--- a/V2授课PPT/W07-第13次课-给产线数据安个家.pptx
+++ b/V2授课PPT/W07-第13次课-给产线数据安个家.pptx
@@ -56,6 +56,9 @@
     <p:sldId id="367" r:id="rId49"/>
     <p:sldId id="335" r:id="rId50"/>
     <p:sldId id="336" r:id="rId51"/>
+    <p:sldId id="371" r:id="rId70"/>
+    <p:sldId id="372" r:id="rId71"/>
+    <p:sldId id="373" r:id="rId72"/>
     <p:sldId id="337" r:id="rId52"/>
     <p:sldId id="338" r:id="rId53"/>
     <p:sldId id="339" r:id="rId54"/>
@@ -8706,7 +8709,7 @@
                 </a:solidFill>
                 <a:latin typeface="微软雅黑" panose="020B0502040204020203" charset="-122"/>
               </a:rPr>
-              <a:t>10 / 63</a:t>
+              <a:t>10 / 66</a:t>
             </a:r>
             <a:endParaRPr sz="1000" b="0">
               <a:solidFill>
@@ -9460,7 +9463,7 @@
                 </a:solidFill>
                 <a:latin typeface="微软雅黑" panose="020B0502040204020203" charset="-122"/>
               </a:rPr>
-              <a:t>11 / 63</a:t>
+              <a:t>11 / 66</a:t>
             </a:r>
             <a:endParaRPr sz="1000" b="0">
               <a:solidFill>
@@ -10214,7 +10217,7 @@
                 </a:solidFill>
                 <a:latin typeface="微软雅黑" panose="020B0502040204020203" charset="-122"/>
               </a:rPr>
-              <a:t>12 / 63</a:t>
+              <a:t>12 / 66</a:t>
             </a:r>
             <a:endParaRPr sz="1000" b="0">
               <a:solidFill>
@@ -10968,7 +10971,7 @@
                 </a:solidFill>
                 <a:latin typeface="微软雅黑" panose="020B0502040204020203" charset="-122"/>
               </a:rPr>
-              <a:t>13 / 63</a:t>
+              <a:t>13 / 66</a:t>
             </a:r>
             <a:endParaRPr sz="1000" b="0">
               <a:solidFill>
@@ -11496,7 +11499,7 @@
                 </a:solidFill>
                 <a:latin typeface="微软雅黑" panose="020B0502040204020203" charset="-122"/>
               </a:rPr>
-              <a:t>14 / 63</a:t>
+              <a:t>14 / 66</a:t>
             </a:r>
             <a:endParaRPr sz="1000" b="0">
               <a:solidFill>
@@ -12603,7 +12606,7 @@
                 </a:solidFill>
                 <a:latin typeface="微软雅黑" panose="020B0502040204020203" charset="-122"/>
               </a:rPr>
-              <a:t>15 / 63</a:t>
+              <a:t>15 / 66</a:t>
             </a:r>
             <a:endParaRPr sz="1000" b="0">
               <a:solidFill>
@@ -13357,7 +13360,7 @@
                 </a:solidFill>
                 <a:latin typeface="微软雅黑" panose="020B0502040204020203" charset="-122"/>
               </a:rPr>
-              <a:t>16 / 63</a:t>
+              <a:t>16 / 66</a:t>
             </a:r>
             <a:endParaRPr sz="1000" b="0">
               <a:solidFill>
@@ -13861,7 +13864,7 @@
                 </a:solidFill>
                 <a:latin typeface="微软雅黑" panose="020B0502040204020203" charset="-122"/>
               </a:rPr>
-              <a:t>17 / 63</a:t>
+              <a:t>17 / 66</a:t>
             </a:r>
             <a:endParaRPr sz="1000" b="0">
               <a:solidFill>
@@ -14615,7 +14618,7 @@
                 </a:solidFill>
                 <a:latin typeface="微软雅黑" panose="020B0502040204020203" charset="-122"/>
               </a:rPr>
-              <a:t>18 / 63</a:t>
+              <a:t>18 / 66</a:t>
             </a:r>
             <a:endParaRPr sz="1000" b="0">
               <a:solidFill>
@@ -15653,7 +15656,7 @@
                 </a:solidFill>
                 <a:latin typeface="微软雅黑" panose="020B0502040204020203" charset="-122"/>
               </a:rPr>
-              <a:t>19 / 63</a:t>
+              <a:t>19 / 66</a:t>
             </a:r>
             <a:endParaRPr sz="1000" b="0">
               <a:solidFill>
@@ -17549,7 +17552,7 @@
                 </a:solidFill>
                 <a:latin typeface="微软雅黑" panose="020B0502040204020203" charset="-122"/>
               </a:rPr>
-              <a:t>2 / 63</a:t>
+              <a:t>2 / 66</a:t>
             </a:r>
             <a:endParaRPr sz="1000" b="0">
               <a:solidFill>
@@ -18470,7 +18473,7 @@
                 </a:solidFill>
                 <a:latin typeface="微软雅黑" panose="020B0502040204020203" charset="-122"/>
               </a:rPr>
-              <a:t>20 / 63</a:t>
+              <a:t>20 / 66</a:t>
             </a:r>
             <a:endParaRPr sz="1000" b="0">
               <a:solidFill>
@@ -19506,7 +19509,7 @@
                 </a:solidFill>
                 <a:latin typeface="微软雅黑" panose="020B0502040204020203" charset="-122"/>
               </a:rPr>
-              <a:t>21 / 63</a:t>
+              <a:t>21 / 66</a:t>
             </a:r>
             <a:endParaRPr sz="1000" b="0">
               <a:solidFill>
@@ -20542,7 +20545,7 @@
                 </a:solidFill>
                 <a:latin typeface="微软雅黑" panose="020B0502040204020203" charset="-122"/>
               </a:rPr>
-              <a:t>22 / 63</a:t>
+              <a:t>22 / 66</a:t>
             </a:r>
             <a:endParaRPr sz="1000" b="0">
               <a:solidFill>
@@ -21578,7 +21581,7 @@
                 </a:solidFill>
                 <a:latin typeface="微软雅黑" panose="020B0502040204020203" charset="-122"/>
               </a:rPr>
-              <a:t>23 / 63</a:t>
+              <a:t>23 / 66</a:t>
             </a:r>
             <a:endParaRPr sz="1000" b="0">
               <a:solidFill>
@@ -22614,7 +22617,7 @@
                 </a:solidFill>
                 <a:latin typeface="微软雅黑" panose="020B0502040204020203" charset="-122"/>
               </a:rPr>
-              <a:t>24 / 63</a:t>
+              <a:t>24 / 66</a:t>
             </a:r>
             <a:endParaRPr sz="1000" b="0">
               <a:solidFill>
@@ -23650,7 +23653,7 @@
                 </a:solidFill>
                 <a:latin typeface="微软雅黑" panose="020B0502040204020203" charset="-122"/>
               </a:rPr>
-              <a:t>25 / 63</a:t>
+              <a:t>25 / 66</a:t>
             </a:r>
             <a:endParaRPr sz="1000" b="0">
               <a:solidFill>
@@ -24686,7 +24689,7 @@
                 </a:solidFill>
                 <a:latin typeface="微软雅黑" panose="020B0502040204020203" charset="-122"/>
               </a:rPr>
-              <a:t>26 / 63</a:t>
+              <a:t>26 / 66</a:t>
             </a:r>
             <a:endParaRPr sz="1000" b="0">
               <a:solidFill>
@@ -25258,7 +25261,7 @@
                 </a:solidFill>
                 <a:latin typeface="微软雅黑" panose="020B0502040204020203" charset="-122"/>
               </a:rPr>
-              <a:t>27 / 63</a:t>
+              <a:t>27 / 66</a:t>
             </a:r>
             <a:endParaRPr sz="1000" b="0">
               <a:solidFill>
@@ -26296,7 +26299,7 @@
                 </a:solidFill>
                 <a:latin typeface="微软雅黑" panose="020B0502040204020203" charset="-122"/>
               </a:rPr>
-              <a:t>28 / 63</a:t>
+              <a:t>28 / 66</a:t>
             </a:r>
             <a:endParaRPr sz="1000" b="0">
               <a:solidFill>
@@ -27050,7 +27053,7 @@
                 </a:solidFill>
                 <a:latin typeface="微软雅黑" panose="020B0502040204020203" charset="-122"/>
               </a:rPr>
-              <a:t>29 / 63</a:t>
+              <a:t>29 / 66</a:t>
             </a:r>
             <a:endParaRPr sz="1000" b="0">
               <a:solidFill>
@@ -27971,7 +27974,7 @@
                 </a:solidFill>
                 <a:latin typeface="微软雅黑" panose="020B0502040204020203" charset="-122"/>
               </a:rPr>
-              <a:t>3 / 63</a:t>
+              <a:t>3 / 66</a:t>
             </a:r>
             <a:endParaRPr sz="1000" b="0">
               <a:solidFill>
@@ -28576,7 +28579,7 @@
                 </a:solidFill>
                 <a:latin typeface="微软雅黑" panose="020B0502040204020203" charset="-122"/>
               </a:rPr>
-              <a:t>30 / 63</a:t>
+              <a:t>30 / 66</a:t>
             </a:r>
             <a:endParaRPr sz="1000" b="0">
               <a:solidFill>
@@ -29321,7 +29324,7 @@
                 </a:solidFill>
                 <a:latin typeface="微软雅黑" panose="020B0502040204020203" charset="-122"/>
               </a:rPr>
-              <a:t>31 / 63</a:t>
+              <a:t>31 / 66</a:t>
             </a:r>
             <a:endParaRPr sz="1000" b="0">
               <a:solidFill>
@@ -30408,7 +30411,7 @@
                 </a:solidFill>
                 <a:latin typeface="微软雅黑" panose="020B0502040204020203" charset="-122"/>
               </a:rPr>
-              <a:t>32 / 63</a:t>
+              <a:t>32 / 66</a:t>
             </a:r>
             <a:endParaRPr sz="1000" b="0">
               <a:solidFill>
@@ -31563,7 +31566,7 @@
                 </a:solidFill>
                 <a:latin typeface="微软雅黑" panose="020B0502040204020203" charset="-122"/>
               </a:rPr>
-              <a:t>33 / 63</a:t>
+              <a:t>33 / 66</a:t>
             </a:r>
             <a:endParaRPr sz="1000" b="0">
               <a:solidFill>
@@ -32484,7 +32487,7 @@
                 </a:solidFill>
                 <a:latin typeface="微软雅黑" panose="020B0502040204020203" charset="-122"/>
               </a:rPr>
-              <a:t>34 / 63</a:t>
+              <a:t>34 / 66</a:t>
             </a:r>
             <a:endParaRPr sz="1000" b="0">
               <a:solidFill>
@@ -33894,7 +33897,7 @@
                 </a:solidFill>
                 <a:latin typeface="微软雅黑" panose="020B0502040204020203" charset="-122"/>
               </a:rPr>
-              <a:t>35 / 63</a:t>
+              <a:t>35 / 66</a:t>
             </a:r>
             <a:endParaRPr sz="1000" b="0">
               <a:solidFill>
@@ -34740,7 +34743,7 @@
                 </a:solidFill>
                 <a:latin typeface="微软雅黑" panose="020B0502040204020203" charset="-122"/>
               </a:rPr>
-              <a:t>36 / 63</a:t>
+              <a:t>36 / 66</a:t>
             </a:r>
             <a:endParaRPr sz="1000" b="0">
               <a:solidFill>
@@ -35439,7 +35442,7 @@
                 </a:solidFill>
                 <a:latin typeface="微软雅黑" panose="020B0502040204020203" charset="-122"/>
               </a:rPr>
-              <a:t>37 / 63</a:t>
+              <a:t>37 / 66</a:t>
             </a:r>
             <a:endParaRPr sz="1000" b="0">
               <a:solidFill>
@@ -36431,7 +36434,7 @@
                 </a:solidFill>
                 <a:latin typeface="微软雅黑" panose="020B0502040204020203" charset="-122"/>
               </a:rPr>
-              <a:t>38 / 63</a:t>
+              <a:t>38 / 66</a:t>
             </a:r>
             <a:endParaRPr sz="1000" b="0">
               <a:solidFill>
@@ -37423,7 +37426,7 @@
                 </a:solidFill>
                 <a:latin typeface="微软雅黑" panose="020B0502040204020203" charset="-122"/>
               </a:rPr>
-              <a:t>39 / 63</a:t>
+              <a:t>39 / 66</a:t>
             </a:r>
             <a:endParaRPr sz="1000" b="0">
               <a:solidFill>
@@ -38461,7 +38464,7 @@
                 </a:solidFill>
                 <a:latin typeface="微软雅黑" panose="020B0502040204020203" charset="-122"/>
               </a:rPr>
-              <a:t>4 / 63</a:t>
+              <a:t>4 / 66</a:t>
             </a:r>
             <a:endParaRPr sz="1000" b="0">
               <a:solidFill>
@@ -39453,7 +39456,7 @@
                 </a:solidFill>
                 <a:latin typeface="微软雅黑" panose="020B0502040204020203" charset="-122"/>
               </a:rPr>
-              <a:t>40 / 63</a:t>
+              <a:t>40 / 66</a:t>
             </a:r>
             <a:endParaRPr sz="1000" b="0">
               <a:solidFill>
@@ -40470,7 +40473,7 @@
                 </a:solidFill>
                 <a:latin typeface="微软雅黑" panose="020B0502040204020203" charset="-122"/>
               </a:rPr>
-              <a:t>41 / 63</a:t>
+              <a:t>41 / 66</a:t>
             </a:r>
             <a:endParaRPr sz="1000" b="0">
               <a:solidFill>
@@ -41470,7 +41473,7 @@
                 </a:solidFill>
                 <a:latin typeface="微软雅黑" panose="020B0502040204020203" charset="-122"/>
               </a:rPr>
-              <a:t>42 / 63</a:t>
+              <a:t>42 / 66</a:t>
             </a:r>
             <a:endParaRPr sz="1000" b="0">
               <a:solidFill>
@@ -42466,7 +42469,7 @@
                 </a:solidFill>
                 <a:latin typeface="微软雅黑" panose="020B0502040204020203" charset="-122"/>
               </a:rPr>
-              <a:t>43 / 63</a:t>
+              <a:t>43 / 66</a:t>
             </a:r>
             <a:endParaRPr sz="1000" b="0">
               <a:solidFill>
@@ -43312,7 +43315,7 @@
                 </a:solidFill>
                 <a:latin typeface="微软雅黑" panose="020B0502040204020203" charset="-122"/>
               </a:rPr>
-              <a:t>44 / 63</a:t>
+              <a:t>44 / 66</a:t>
             </a:r>
             <a:endParaRPr sz="1000" b="0">
               <a:solidFill>
@@ -44158,7 +44161,7 @@
                 </a:solidFill>
                 <a:latin typeface="微软雅黑" panose="020B0502040204020203" charset="-122"/>
               </a:rPr>
-              <a:t>45 / 63</a:t>
+              <a:t>45 / 66</a:t>
             </a:r>
             <a:endParaRPr sz="1000" b="0">
               <a:solidFill>
@@ -46350,7 +46353,7 @@
                 </a:solidFill>
                 <a:latin typeface="微软雅黑" panose="020B0502040204020203" charset="-122"/>
               </a:rPr>
-              <a:t>47 / 63</a:t>
+              <a:t>47 / 66</a:t>
             </a:r>
             <a:endParaRPr sz="1000" b="0">
               <a:solidFill>
@@ -47118,7 +47121,7 @@
                 </a:solidFill>
                 <a:latin typeface="微软雅黑" panose="020B0502040204020203" charset="-122"/>
               </a:rPr>
-              <a:t>48 / 63</a:t>
+              <a:t>48 / 66</a:t>
             </a:r>
             <a:endParaRPr sz="1000" b="0">
               <a:solidFill>
@@ -47848,7 +47851,7 @@
                 </a:solidFill>
                 <a:latin typeface="微软雅黑" panose="020B0502040204020203" charset="-122"/>
               </a:rPr>
-              <a:t>49 / 63</a:t>
+              <a:t>52 / 66</a:t>
             </a:r>
             <a:endParaRPr sz="1000" b="0">
               <a:solidFill>
@@ -49412,7 +49415,7 @@
                 </a:solidFill>
                 <a:latin typeface="微软雅黑" panose="020B0502040204020203" charset="-122"/>
               </a:rPr>
-              <a:t>5 / 63</a:t>
+              <a:t>5 / 66</a:t>
             </a:r>
             <a:endParaRPr sz="1000" b="0">
               <a:solidFill>
@@ -50051,7 +50054,7 @@
                 </a:solidFill>
                 <a:latin typeface="微软雅黑" panose="020B0502040204020203" charset="-122"/>
               </a:rPr>
-              <a:t>50 / 63</a:t>
+              <a:t>53 / 66</a:t>
             </a:r>
             <a:endParaRPr sz="1000" b="0">
               <a:solidFill>
@@ -50897,7 +50900,7 @@
                 </a:solidFill>
                 <a:latin typeface="微软雅黑" panose="020B0502040204020203" charset="-122"/>
               </a:rPr>
-              <a:t>51 / 63</a:t>
+              <a:t>54 / 66</a:t>
             </a:r>
             <a:endParaRPr sz="1000" b="0">
               <a:solidFill>
@@ -52643,7 +52646,7 @@
                 </a:solidFill>
                 <a:latin typeface="微软雅黑" panose="020B0502040204020203" charset="-122"/>
               </a:rPr>
-              <a:t>52 / 63</a:t>
+              <a:t>55 / 66</a:t>
             </a:r>
             <a:endParaRPr sz="1000" b="0">
               <a:solidFill>
@@ -53495,7 +53498,7 @@
                 </a:solidFill>
                 <a:latin typeface="微软雅黑" panose="020B0502040204020203" charset="-122"/>
               </a:rPr>
-              <a:t>53 / 63</a:t>
+              <a:t>56 / 66</a:t>
             </a:r>
             <a:endParaRPr sz="1000" b="0">
               <a:solidFill>
@@ -54719,7 +54722,7 @@
                 </a:solidFill>
                 <a:latin typeface="微软雅黑" panose="020B0502040204020203" charset="-122"/>
               </a:rPr>
-              <a:t>54 / 63</a:t>
+              <a:t>57 / 66</a:t>
             </a:r>
             <a:endParaRPr sz="1000" b="0">
               <a:solidFill>
@@ -55638,7 +55641,7 @@
                 </a:solidFill>
                 <a:latin typeface="微软雅黑" panose="020B0502040204020203" charset="-122"/>
               </a:rPr>
-              <a:t>55 / 63</a:t>
+              <a:t>58 / 66</a:t>
             </a:r>
             <a:endParaRPr sz="1000" b="0">
               <a:solidFill>
@@ -56676,7 +56679,7 @@
                 </a:solidFill>
                 <a:latin typeface="微软雅黑" panose="020B0502040204020203" charset="-122"/>
               </a:rPr>
-              <a:t>56 / 63</a:t>
+              <a:t>59 / 66</a:t>
             </a:r>
             <a:endParaRPr sz="1000" b="0">
               <a:solidFill>
@@ -57714,7 +57717,7 @@
                 </a:solidFill>
                 <a:latin typeface="微软雅黑" panose="020B0502040204020203" charset="-122"/>
               </a:rPr>
-              <a:t>57 / 63</a:t>
+              <a:t>60 / 66</a:t>
             </a:r>
             <a:endParaRPr sz="1000" b="0">
               <a:solidFill>
@@ -59057,7 +59060,7 @@
                 </a:solidFill>
                 <a:latin typeface="微软雅黑" panose="020B0502040204020203" charset="-122"/>
               </a:rPr>
-              <a:t>58 / 63</a:t>
+              <a:t>61 / 66</a:t>
             </a:r>
             <a:endParaRPr sz="1000" b="0">
               <a:solidFill>
@@ -60095,7 +60098,7 @@
                 </a:solidFill>
                 <a:latin typeface="微软雅黑" panose="020B0502040204020203" charset="-122"/>
               </a:rPr>
-              <a:t>59 / 63</a:t>
+              <a:t>62 / 66</a:t>
             </a:r>
             <a:endParaRPr sz="1000" b="0">
               <a:solidFill>
@@ -60849,7 +60852,7 @@
                 </a:solidFill>
                 <a:latin typeface="微软雅黑" panose="020B0502040204020203" charset="-122"/>
               </a:rPr>
-              <a:t>6 / 63</a:t>
+              <a:t>6 / 66</a:t>
             </a:r>
             <a:endParaRPr sz="1000" b="0">
               <a:solidFill>
@@ -61887,7 +61890,7 @@
                 </a:solidFill>
                 <a:latin typeface="微软雅黑" panose="020B0502040204020203" charset="-122"/>
               </a:rPr>
-              <a:t>60 / 63</a:t>
+              <a:t>63 / 66</a:t>
             </a:r>
             <a:endParaRPr sz="1000" b="0">
               <a:solidFill>
@@ -62733,7 +62736,7 @@
                 </a:solidFill>
                 <a:latin typeface="微软雅黑" panose="020B0502040204020203" charset="-122"/>
               </a:rPr>
-              <a:t>61 / 63</a:t>
+              <a:t>64 / 66</a:t>
             </a:r>
             <a:endParaRPr sz="1000" b="0">
               <a:solidFill>
@@ -63123,7 +63126,7 @@
                 </a:solidFill>
                 <a:latin typeface="微软雅黑" panose="020B0502040204020203" charset="-122"/>
               </a:rPr>
-              <a:t>62 / 63</a:t>
+              <a:t>65 / 66</a:t>
             </a:r>
             <a:endParaRPr sz="1000" b="0">
               <a:solidFill>
@@ -63530,6 +63533,3118 @@
 </p:sld>
 </file>
 
+<file path=ppt/slides/slide64.xml><?xml version="1.0" encoding="utf-8"?>
+<p:sld xmlns:a="http://schemas.openxmlformats.org/drawingml/2006/main" xmlns:p="http://schemas.openxmlformats.org/presentationml/2006/main" xmlns:r="http://schemas.openxmlformats.org/officeDocument/2006/relationships">
+  <p:cSld>
+    <p:spTree>
+      <p:nvGrpSpPr>
+        <p:cNvPr id="1" name=""/>
+        <p:cNvGrpSpPr/>
+        <p:nvPr/>
+      </p:nvGrpSpPr>
+      <p:grpSpPr/>
+      <p:sp>
+        <p:nvSpPr>
+          <p:cNvPr id="2" name="Rounded Rectangle 1"/>
+          <p:cNvSpPr/>
+          <p:nvPr/>
+        </p:nvSpPr>
+        <p:spPr>
+          <a:xfrm>
+            <a:off x="0" y="0"/>
+            <a:ext cx="12191695" cy="64008"/>
+          </a:xfrm>
+          <a:prstGeom prst="roundRect">
+            <a:avLst>
+              <a:gd name="adj" fmla="val 50000"/>
+            </a:avLst>
+          </a:prstGeom>
+          <a:solidFill>
+            <a:srgbClr val="0B5E54"/>
+          </a:solidFill>
+          <a:ln>
+            <a:noFill/>
+          </a:ln>
+          <a:effectLst/>
+        </p:spPr>
+        <p:style>
+          <a:lnRef idx="1">
+            <a:schemeClr val="accent1"/>
+          </a:lnRef>
+          <a:fillRef idx="3">
+            <a:schemeClr val="accent1"/>
+          </a:fillRef>
+          <a:effectRef idx="2">
+            <a:schemeClr val="accent1"/>
+          </a:effectRef>
+          <a:fontRef idx="minor">
+            <a:schemeClr val="lt1"/>
+          </a:fontRef>
+        </p:style>
+        <p:txBody>
+          <a:bodyPr rtlCol="0" anchor="ctr"/>
+          <a:lstStyle/>
+          <a:p>
+            <a:pPr algn="ctr"/>
+          </a:p>
+        </p:txBody>
+      </p:sp>
+      <p:sp>
+        <p:nvSpPr>
+          <p:cNvPr id="3" name="TextBox 2"/>
+          <p:cNvSpPr txBox="1"/>
+          <p:nvPr/>
+        </p:nvSpPr>
+        <p:spPr>
+          <a:xfrm>
+            <a:off x="475488" y="146304"/>
+            <a:ext cx="8229600" cy="292608"/>
+          </a:xfrm>
+          <a:prstGeom prst="rect">
+            <a:avLst/>
+          </a:prstGeom>
+          <a:noFill/>
+        </p:spPr>
+        <p:txBody>
+          <a:bodyPr wrap="square" anchor="t" lIns="0" rIns="0" tIns="0" bIns="0">
+            <a:spAutoFit/>
+          </a:bodyPr>
+          <a:lstStyle/>
+          <a:p>
+            <a:pPr algn="l">
+              <a:lnSpc>
+                <a:spcPct val="114000"/>
+              </a:lnSpc>
+            </a:pPr>
+            <a:r>
+              <a:rPr sz="1100" b="1">
+                <a:solidFill>
+                  <a:srgbClr val="0B5E54"/>
+                </a:solidFill>
+              </a:rPr>
+              <a:t>工单实战 · 本次实跑结果</a:t>
+            </a:r>
+          </a:p>
+        </p:txBody>
+      </p:sp>
+      <p:sp>
+        <p:nvSpPr>
+          <p:cNvPr id="4" name="Rounded Rectangle 3"/>
+          <p:cNvSpPr/>
+          <p:nvPr/>
+        </p:nvSpPr>
+        <p:spPr>
+          <a:xfrm>
+            <a:off x="475488" y="475488"/>
+            <a:ext cx="1881187" cy="310896"/>
+          </a:xfrm>
+          <a:prstGeom prst="roundRect">
+            <a:avLst>
+              <a:gd name="adj" fmla="val 50000"/>
+            </a:avLst>
+          </a:prstGeom>
+          <a:solidFill>
+            <a:srgbClr val="C9A227"/>
+          </a:solidFill>
+          <a:ln>
+            <a:noFill/>
+          </a:ln>
+          <a:effectLst/>
+        </p:spPr>
+        <p:style>
+          <a:lnRef idx="1">
+            <a:schemeClr val="accent1"/>
+          </a:lnRef>
+          <a:fillRef idx="3">
+            <a:schemeClr val="accent1"/>
+          </a:fillRef>
+          <a:effectRef idx="2">
+            <a:schemeClr val="accent1"/>
+          </a:effectRef>
+          <a:fontRef idx="minor">
+            <a:schemeClr val="lt1"/>
+          </a:fontRef>
+        </p:style>
+        <p:txBody>
+          <a:bodyPr rtlCol="0" anchor="ctr"/>
+          <a:lstStyle/>
+          <a:p>
+            <a:pPr algn="ctr"/>
+          </a:p>
+        </p:txBody>
+      </p:sp>
+      <p:sp>
+        <p:nvSpPr>
+          <p:cNvPr id="5" name="TextBox 4"/>
+          <p:cNvSpPr txBox="1"/>
+          <p:nvPr/>
+        </p:nvSpPr>
+        <p:spPr>
+          <a:xfrm>
+            <a:off x="475488" y="475488"/>
+            <a:ext cx="1881187" cy="310896"/>
+          </a:xfrm>
+          <a:prstGeom prst="rect">
+            <a:avLst/>
+          </a:prstGeom>
+          <a:noFill/>
+        </p:spPr>
+        <p:txBody>
+          <a:bodyPr wrap="square" anchor="ctr" lIns="0" rIns="0" tIns="0" bIns="0">
+            <a:spAutoFit/>
+          </a:bodyPr>
+          <a:lstStyle/>
+          <a:p>
+            <a:pPr algn="ctr">
+              <a:lnSpc>
+                <a:spcPct val="114000"/>
+              </a:lnSpc>
+            </a:pPr>
+            <a:r>
+              <a:rPr sz="1050" b="1">
+                <a:solidFill>
+                  <a:srgbClr val="FFFFFF"/>
+                </a:solidFill>
+              </a:rPr>
+              <a:t>REAL RUN · 四档逐字实测</a:t>
+            </a:r>
+          </a:p>
+        </p:txBody>
+      </p:sp>
+      <p:sp>
+        <p:nvSpPr>
+          <p:cNvPr id="6" name="TextBox 5"/>
+          <p:cNvSpPr txBox="1"/>
+          <p:nvPr/>
+        </p:nvSpPr>
+        <p:spPr>
+          <a:xfrm>
+            <a:off x="475488" y="859536"/>
+            <a:ext cx="11237976" cy="502920"/>
+          </a:xfrm>
+          <a:prstGeom prst="rect">
+            <a:avLst/>
+          </a:prstGeom>
+          <a:noFill/>
+        </p:spPr>
+        <p:txBody>
+          <a:bodyPr wrap="square" anchor="t" lIns="0" rIns="0" tIns="0" bIns="0">
+            <a:spAutoFit/>
+          </a:bodyPr>
+          <a:lstStyle/>
+          <a:p>
+            <a:pPr algn="l">
+              <a:lnSpc>
+                <a:spcPct val="114000"/>
+              </a:lnSpc>
+            </a:pPr>
+            <a:r>
+              <a:rPr sz="2200" b="1">
+                <a:solidFill>
+                  <a:srgbClr val="1B2B28"/>
+                </a:solidFill>
+              </a:rPr>
+              <a:t>P5.1/P5.2 p55_warehouse_orm：本次 D/C/B/A 四档实测</a:t>
+            </a:r>
+          </a:p>
+        </p:txBody>
+      </p:sp>
+      <p:sp>
+        <p:nvSpPr>
+          <p:cNvPr id="7" name="Rounded Rectangle 6"/>
+          <p:cNvSpPr/>
+          <p:nvPr/>
+        </p:nvSpPr>
+        <p:spPr>
+          <a:xfrm>
+            <a:off x="475488" y="1389888"/>
+            <a:ext cx="1234440" cy="27432"/>
+          </a:xfrm>
+          <a:prstGeom prst="roundRect">
+            <a:avLst>
+              <a:gd name="adj" fmla="val 50000"/>
+            </a:avLst>
+          </a:prstGeom>
+          <a:solidFill>
+            <a:srgbClr val="C9A227"/>
+          </a:solidFill>
+          <a:ln>
+            <a:noFill/>
+          </a:ln>
+          <a:effectLst/>
+        </p:spPr>
+        <p:style>
+          <a:lnRef idx="1">
+            <a:schemeClr val="accent1"/>
+          </a:lnRef>
+          <a:fillRef idx="3">
+            <a:schemeClr val="accent1"/>
+          </a:fillRef>
+          <a:effectRef idx="2">
+            <a:schemeClr val="accent1"/>
+          </a:effectRef>
+          <a:fontRef idx="minor">
+            <a:schemeClr val="lt1"/>
+          </a:fontRef>
+        </p:style>
+        <p:txBody>
+          <a:bodyPr rtlCol="0" anchor="ctr"/>
+          <a:lstStyle/>
+          <a:p>
+            <a:pPr algn="ctr"/>
+          </a:p>
+        </p:txBody>
+      </p:sp>
+      <p:sp>
+        <p:nvSpPr>
+          <p:cNvPr id="8" name="Rounded Rectangle 7"/>
+          <p:cNvSpPr/>
+          <p:nvPr/>
+        </p:nvSpPr>
+        <p:spPr>
+          <a:xfrm>
+            <a:off x="475488" y="6419088"/>
+            <a:ext cx="11237976" cy="10972"/>
+          </a:xfrm>
+          <a:prstGeom prst="roundRect">
+            <a:avLst>
+              <a:gd name="adj" fmla="val 50000"/>
+            </a:avLst>
+          </a:prstGeom>
+          <a:solidFill>
+            <a:srgbClr val="E4F1EE"/>
+          </a:solidFill>
+          <a:ln>
+            <a:noFill/>
+          </a:ln>
+          <a:effectLst/>
+        </p:spPr>
+        <p:style>
+          <a:lnRef idx="1">
+            <a:schemeClr val="accent1"/>
+          </a:lnRef>
+          <a:fillRef idx="3">
+            <a:schemeClr val="accent1"/>
+          </a:fillRef>
+          <a:effectRef idx="2">
+            <a:schemeClr val="accent1"/>
+          </a:effectRef>
+          <a:fontRef idx="minor">
+            <a:schemeClr val="lt1"/>
+          </a:fontRef>
+        </p:style>
+        <p:txBody>
+          <a:bodyPr rtlCol="0" anchor="ctr"/>
+          <a:lstStyle/>
+          <a:p>
+            <a:pPr algn="ctr"/>
+          </a:p>
+        </p:txBody>
+      </p:sp>
+      <p:sp>
+        <p:nvSpPr>
+          <p:cNvPr id="9" name="TextBox 8"/>
+          <p:cNvSpPr txBox="1"/>
+          <p:nvPr/>
+        </p:nvSpPr>
+        <p:spPr>
+          <a:xfrm>
+            <a:off x="475488" y="6455664"/>
+            <a:ext cx="7315200" cy="292608"/>
+          </a:xfrm>
+          <a:prstGeom prst="rect">
+            <a:avLst/>
+          </a:prstGeom>
+          <a:noFill/>
+        </p:spPr>
+        <p:txBody>
+          <a:bodyPr wrap="square" anchor="t" lIns="0" rIns="0" tIns="0" bIns="0">
+            <a:spAutoFit/>
+          </a:bodyPr>
+          <a:lstStyle/>
+          <a:p>
+            <a:pPr algn="l">
+              <a:lnSpc>
+                <a:spcPct val="114000"/>
+              </a:lnSpc>
+            </a:pPr>
+            <a:r>
+              <a:rPr sz="900" b="0">
+                <a:solidFill>
+                  <a:srgbClr val="5C6E6A"/>
+                </a:solidFill>
+              </a:rPr>
+              <a:t>两江智造集团 · Python程序设计（项目实战）</a:t>
+            </a:r>
+          </a:p>
+        </p:txBody>
+      </p:sp>
+      <p:sp>
+        <p:nvSpPr>
+          <p:cNvPr id="10" name="TextBox 9"/>
+          <p:cNvSpPr txBox="1"/>
+          <p:nvPr/>
+        </p:nvSpPr>
+        <p:spPr>
+          <a:xfrm>
+            <a:off x="10597896" y="6537960"/>
+            <a:ext cx="996696" cy="301752"/>
+          </a:xfrm>
+          <a:prstGeom prst="rect">
+            <a:avLst/>
+          </a:prstGeom>
+          <a:noFill/>
+        </p:spPr>
+        <p:txBody>
+          <a:bodyPr wrap="square" anchor="t" lIns="0" rIns="0" tIns="0" bIns="0">
+            <a:spAutoFit/>
+          </a:bodyPr>
+          <a:lstStyle/>
+          <a:p>
+            <a:pPr algn="r">
+              <a:lnSpc>
+                <a:spcPct val="114000"/>
+              </a:lnSpc>
+            </a:pPr>
+            <a:r>
+              <a:rPr sz="1000" b="0">
+                <a:solidFill>
+                  <a:srgbClr val="8A97B5"/>
+                </a:solidFill>
+              </a:rPr>
+              <a:t>49 / 66</a:t>
+            </a:r>
+          </a:p>
+        </p:txBody>
+      </p:sp>
+      <p:sp>
+        <p:nvSpPr>
+          <p:cNvPr id="11" name="Rounded Rectangle 10"/>
+          <p:cNvSpPr/>
+          <p:nvPr/>
+        </p:nvSpPr>
+        <p:spPr>
+          <a:xfrm>
+            <a:off x="475488" y="1554480"/>
+            <a:ext cx="11237976" cy="755913"/>
+          </a:xfrm>
+          <a:prstGeom prst="roundRect">
+            <a:avLst>
+              <a:gd name="adj" fmla="val 6000"/>
+            </a:avLst>
+          </a:prstGeom>
+          <a:solidFill>
+            <a:srgbClr val="FFFFFF"/>
+          </a:solidFill>
+          <a:ln w="9525">
+            <a:solidFill>
+              <a:srgbClr val="E4F1EE"/>
+            </a:solidFill>
+          </a:ln>
+          <a:effectLst/>
+        </p:spPr>
+        <p:style>
+          <a:lnRef idx="1">
+            <a:schemeClr val="accent1"/>
+          </a:lnRef>
+          <a:fillRef idx="3">
+            <a:schemeClr val="accent1"/>
+          </a:fillRef>
+          <a:effectRef idx="2">
+            <a:schemeClr val="accent1"/>
+          </a:effectRef>
+          <a:fontRef idx="minor">
+            <a:schemeClr val="lt1"/>
+          </a:fontRef>
+        </p:style>
+        <p:txBody>
+          <a:bodyPr rtlCol="0" anchor="ctr"/>
+          <a:lstStyle/>
+          <a:p>
+            <a:pPr algn="ctr"/>
+          </a:p>
+        </p:txBody>
+      </p:sp>
+      <p:sp>
+        <p:nvSpPr>
+          <p:cNvPr id="12" name="Rounded Rectangle 11"/>
+          <p:cNvSpPr/>
+          <p:nvPr/>
+        </p:nvSpPr>
+        <p:spPr>
+          <a:xfrm>
+            <a:off x="475488" y="1554480"/>
+            <a:ext cx="54864" cy="755913"/>
+          </a:xfrm>
+          <a:prstGeom prst="roundRect">
+            <a:avLst>
+              <a:gd name="adj" fmla="val 50000"/>
+            </a:avLst>
+          </a:prstGeom>
+          <a:solidFill>
+            <a:srgbClr val="5C6E6A"/>
+          </a:solidFill>
+          <a:ln>
+            <a:noFill/>
+          </a:ln>
+          <a:effectLst/>
+        </p:spPr>
+        <p:style>
+          <a:lnRef idx="1">
+            <a:schemeClr val="accent1"/>
+          </a:lnRef>
+          <a:fillRef idx="3">
+            <a:schemeClr val="accent1"/>
+          </a:fillRef>
+          <a:effectRef idx="2">
+            <a:schemeClr val="accent1"/>
+          </a:effectRef>
+          <a:fontRef idx="minor">
+            <a:schemeClr val="lt1"/>
+          </a:fontRef>
+        </p:style>
+        <p:txBody>
+          <a:bodyPr rtlCol="0" anchor="ctr"/>
+          <a:lstStyle/>
+          <a:p>
+            <a:pPr algn="ctr"/>
+          </a:p>
+        </p:txBody>
+      </p:sp>
+      <p:sp>
+        <p:nvSpPr>
+          <p:cNvPr id="13" name="Rounded Rectangle 12"/>
+          <p:cNvSpPr/>
+          <p:nvPr/>
+        </p:nvSpPr>
+        <p:spPr>
+          <a:xfrm>
+            <a:off x="621792" y="1636776"/>
+            <a:ext cx="237744" cy="237744"/>
+          </a:xfrm>
+          <a:prstGeom prst="roundRect">
+            <a:avLst>
+              <a:gd name="adj" fmla="val 28000"/>
+            </a:avLst>
+          </a:prstGeom>
+          <a:solidFill>
+            <a:srgbClr val="5C6E6A"/>
+          </a:solidFill>
+          <a:ln>
+            <a:noFill/>
+          </a:ln>
+          <a:effectLst/>
+        </p:spPr>
+        <p:style>
+          <a:lnRef idx="1">
+            <a:schemeClr val="accent1"/>
+          </a:lnRef>
+          <a:fillRef idx="3">
+            <a:schemeClr val="accent1"/>
+          </a:fillRef>
+          <a:effectRef idx="2">
+            <a:schemeClr val="accent1"/>
+          </a:effectRef>
+          <a:fontRef idx="minor">
+            <a:schemeClr val="lt1"/>
+          </a:fontRef>
+        </p:style>
+        <p:txBody>
+          <a:bodyPr rtlCol="0" anchor="ctr"/>
+          <a:lstStyle/>
+          <a:p>
+            <a:pPr algn="ctr"/>
+          </a:p>
+        </p:txBody>
+      </p:sp>
+      <p:sp>
+        <p:nvSpPr>
+          <p:cNvPr id="14" name="TextBox 13"/>
+          <p:cNvSpPr txBox="1"/>
+          <p:nvPr/>
+        </p:nvSpPr>
+        <p:spPr>
+          <a:xfrm>
+            <a:off x="621792" y="1636776"/>
+            <a:ext cx="237744" cy="237744"/>
+          </a:xfrm>
+          <a:prstGeom prst="rect">
+            <a:avLst/>
+          </a:prstGeom>
+          <a:noFill/>
+        </p:spPr>
+        <p:txBody>
+          <a:bodyPr wrap="square" anchor="ctr" lIns="0" rIns="0" tIns="0" bIns="0">
+            <a:spAutoFit/>
+          </a:bodyPr>
+          <a:lstStyle/>
+          <a:p>
+            <a:pPr algn="ctr">
+              <a:lnSpc>
+                <a:spcPct val="114000"/>
+              </a:lnSpc>
+            </a:pPr>
+            <a:r>
+              <a:rPr sz="1000" b="1">
+                <a:solidFill>
+                  <a:srgbClr val="FFFFFF"/>
+                </a:solidFill>
+              </a:rPr>
+              <a:t>D</a:t>
+            </a:r>
+          </a:p>
+        </p:txBody>
+      </p:sp>
+      <p:sp>
+        <p:nvSpPr>
+          <p:cNvPr id="15" name="TextBox 14"/>
+          <p:cNvSpPr txBox="1"/>
+          <p:nvPr/>
+        </p:nvSpPr>
+        <p:spPr>
+          <a:xfrm>
+            <a:off x="932688" y="1618488"/>
+            <a:ext cx="8778240" cy="274320"/>
+          </a:xfrm>
+          <a:prstGeom prst="rect">
+            <a:avLst/>
+          </a:prstGeom>
+          <a:noFill/>
+        </p:spPr>
+        <p:txBody>
+          <a:bodyPr wrap="square" anchor="ctr" lIns="0" rIns="0" tIns="0" bIns="0">
+            <a:spAutoFit/>
+          </a:bodyPr>
+          <a:lstStyle/>
+          <a:p>
+            <a:pPr algn="l">
+              <a:lnSpc>
+                <a:spcPct val="114000"/>
+              </a:lnSpc>
+            </a:pPr>
+            <a:r>
+              <a:rPr sz="1050" b="1">
+                <a:solidFill>
+                  <a:srgbClr val="1B2B28"/>
+                </a:solidFill>
+              </a:rPr>
+              <a:t>及格</a:t>
+            </a:r>
+            <a:r>
+              <a:rPr sz="850" b="0">
+                <a:solidFill>
+                  <a:srgbClr val="5C6E6A"/>
+                </a:solidFill>
+              </a:rPr>
+              <a:t>   验收口径：</a:t>
+            </a:r>
+            <a:r>
+              <a:rPr sz="850" b="0">
+                <a:solidFill>
+                  <a:srgbClr val="5C6E6A"/>
+                </a:solidFill>
+              </a:rPr>
+              <a:t>4表设计合理；ORM入库成功；2条统计查询可用</a:t>
+            </a:r>
+          </a:p>
+        </p:txBody>
+      </p:sp>
+      <p:sp>
+        <p:nvSpPr>
+          <p:cNvPr id="16" name="Rounded Rectangle 15"/>
+          <p:cNvSpPr/>
+          <p:nvPr/>
+        </p:nvSpPr>
+        <p:spPr>
+          <a:xfrm>
+            <a:off x="11131803" y="1645920"/>
+            <a:ext cx="453644" cy="237744"/>
+          </a:xfrm>
+          <a:prstGeom prst="roundRect">
+            <a:avLst>
+              <a:gd name="adj" fmla="val 50000"/>
+            </a:avLst>
+          </a:prstGeom>
+          <a:solidFill>
+            <a:srgbClr val="0B5E54"/>
+          </a:solidFill>
+          <a:ln>
+            <a:noFill/>
+          </a:ln>
+          <a:effectLst/>
+        </p:spPr>
+        <p:style>
+          <a:lnRef idx="1">
+            <a:schemeClr val="accent1"/>
+          </a:lnRef>
+          <a:fillRef idx="3">
+            <a:schemeClr val="accent1"/>
+          </a:fillRef>
+          <a:effectRef idx="2">
+            <a:schemeClr val="accent1"/>
+          </a:effectRef>
+          <a:fontRef idx="minor">
+            <a:schemeClr val="lt1"/>
+          </a:fontRef>
+        </p:style>
+        <p:txBody>
+          <a:bodyPr rtlCol="0" anchor="ctr"/>
+          <a:lstStyle/>
+          <a:p>
+            <a:pPr algn="ctr"/>
+          </a:p>
+        </p:txBody>
+      </p:sp>
+      <p:sp>
+        <p:nvSpPr>
+          <p:cNvPr id="17" name="TextBox 16"/>
+          <p:cNvSpPr txBox="1"/>
+          <p:nvPr/>
+        </p:nvSpPr>
+        <p:spPr>
+          <a:xfrm>
+            <a:off x="11131803" y="1645920"/>
+            <a:ext cx="453644" cy="237744"/>
+          </a:xfrm>
+          <a:prstGeom prst="rect">
+            <a:avLst/>
+          </a:prstGeom>
+          <a:noFill/>
+        </p:spPr>
+        <p:txBody>
+          <a:bodyPr wrap="square" anchor="ctr" lIns="0" rIns="0" tIns="0" bIns="0">
+            <a:spAutoFit/>
+          </a:bodyPr>
+          <a:lstStyle/>
+          <a:p>
+            <a:pPr algn="ctr">
+              <a:lnSpc>
+                <a:spcPct val="114000"/>
+              </a:lnSpc>
+            </a:pPr>
+            <a:r>
+              <a:rPr sz="850" b="1">
+                <a:solidFill>
+                  <a:srgbClr val="FFFFFF"/>
+                </a:solidFill>
+              </a:rPr>
+              <a:t>达标</a:t>
+            </a:r>
+          </a:p>
+        </p:txBody>
+      </p:sp>
+      <p:sp>
+        <p:nvSpPr>
+          <p:cNvPr id="18" name="TextBox 17"/>
+          <p:cNvSpPr txBox="1"/>
+          <p:nvPr/>
+        </p:nvSpPr>
+        <p:spPr>
+          <a:xfrm>
+            <a:off x="932688" y="1901952"/>
+            <a:ext cx="10671047" cy="353577"/>
+          </a:xfrm>
+          <a:prstGeom prst="rect">
+            <a:avLst/>
+          </a:prstGeom>
+          <a:noFill/>
+        </p:spPr>
+        <p:txBody>
+          <a:bodyPr wrap="square" anchor="t" lIns="0" rIns="0" tIns="0" bIns="0">
+            <a:spAutoFit/>
+          </a:bodyPr>
+          <a:lstStyle/>
+          <a:p>
+            <a:pPr algn="l">
+              <a:lnSpc>
+                <a:spcPct val="114000"/>
+              </a:lnSpc>
+            </a:pPr>
+            <a:r>
+              <a:rPr sz="950" b="0">
+                <a:solidFill>
+                  <a:srgbClr val="1B2B28"/>
+                </a:solidFill>
+              </a:rPr>
+              <a:t>建表 4/4 张（缺:无）｜records 入库 1436 行（种子 500＋P4缓冲 936，预期 1436，相符=是）｜统计查询可用 3/3 条（T4a 3 行、T4b 3 行、T4c 12 行；门槛 ≥2 条）</a:t>
+            </a:r>
+          </a:p>
+        </p:txBody>
+      </p:sp>
+      <p:sp>
+        <p:nvSpPr>
+          <p:cNvPr id="19" name="Rounded Rectangle 18"/>
+          <p:cNvSpPr/>
+          <p:nvPr/>
+        </p:nvSpPr>
+        <p:spPr>
+          <a:xfrm>
+            <a:off x="475488" y="2374401"/>
+            <a:ext cx="11237976" cy="970276"/>
+          </a:xfrm>
+          <a:prstGeom prst="roundRect">
+            <a:avLst>
+              <a:gd name="adj" fmla="val 6000"/>
+            </a:avLst>
+          </a:prstGeom>
+          <a:solidFill>
+            <a:srgbClr val="FFFFFF"/>
+          </a:solidFill>
+          <a:ln w="9525">
+            <a:solidFill>
+              <a:srgbClr val="E4F1EE"/>
+            </a:solidFill>
+          </a:ln>
+          <a:effectLst/>
+        </p:spPr>
+        <p:style>
+          <a:lnRef idx="1">
+            <a:schemeClr val="accent1"/>
+          </a:lnRef>
+          <a:fillRef idx="3">
+            <a:schemeClr val="accent1"/>
+          </a:fillRef>
+          <a:effectRef idx="2">
+            <a:schemeClr val="accent1"/>
+          </a:effectRef>
+          <a:fontRef idx="minor">
+            <a:schemeClr val="lt1"/>
+          </a:fontRef>
+        </p:style>
+        <p:txBody>
+          <a:bodyPr rtlCol="0" anchor="ctr"/>
+          <a:lstStyle/>
+          <a:p>
+            <a:pPr algn="ctr"/>
+          </a:p>
+        </p:txBody>
+      </p:sp>
+      <p:sp>
+        <p:nvSpPr>
+          <p:cNvPr id="20" name="Rounded Rectangle 19"/>
+          <p:cNvSpPr/>
+          <p:nvPr/>
+        </p:nvSpPr>
+        <p:spPr>
+          <a:xfrm>
+            <a:off x="475488" y="2374401"/>
+            <a:ext cx="54864" cy="970276"/>
+          </a:xfrm>
+          <a:prstGeom prst="roundRect">
+            <a:avLst>
+              <a:gd name="adj" fmla="val 50000"/>
+            </a:avLst>
+          </a:prstGeom>
+          <a:solidFill>
+            <a:srgbClr val="157A6D"/>
+          </a:solidFill>
+          <a:ln>
+            <a:noFill/>
+          </a:ln>
+          <a:effectLst/>
+        </p:spPr>
+        <p:style>
+          <a:lnRef idx="1">
+            <a:schemeClr val="accent1"/>
+          </a:lnRef>
+          <a:fillRef idx="3">
+            <a:schemeClr val="accent1"/>
+          </a:fillRef>
+          <a:effectRef idx="2">
+            <a:schemeClr val="accent1"/>
+          </a:effectRef>
+          <a:fontRef idx="minor">
+            <a:schemeClr val="lt1"/>
+          </a:fontRef>
+        </p:style>
+        <p:txBody>
+          <a:bodyPr rtlCol="0" anchor="ctr"/>
+          <a:lstStyle/>
+          <a:p>
+            <a:pPr algn="ctr"/>
+          </a:p>
+        </p:txBody>
+      </p:sp>
+      <p:sp>
+        <p:nvSpPr>
+          <p:cNvPr id="21" name="Rounded Rectangle 20"/>
+          <p:cNvSpPr/>
+          <p:nvPr/>
+        </p:nvSpPr>
+        <p:spPr>
+          <a:xfrm>
+            <a:off x="621792" y="2456697"/>
+            <a:ext cx="237744" cy="237744"/>
+          </a:xfrm>
+          <a:prstGeom prst="roundRect">
+            <a:avLst>
+              <a:gd name="adj" fmla="val 28000"/>
+            </a:avLst>
+          </a:prstGeom>
+          <a:solidFill>
+            <a:srgbClr val="157A6D"/>
+          </a:solidFill>
+          <a:ln>
+            <a:noFill/>
+          </a:ln>
+          <a:effectLst/>
+        </p:spPr>
+        <p:style>
+          <a:lnRef idx="1">
+            <a:schemeClr val="accent1"/>
+          </a:lnRef>
+          <a:fillRef idx="3">
+            <a:schemeClr val="accent1"/>
+          </a:fillRef>
+          <a:effectRef idx="2">
+            <a:schemeClr val="accent1"/>
+          </a:effectRef>
+          <a:fontRef idx="minor">
+            <a:schemeClr val="lt1"/>
+          </a:fontRef>
+        </p:style>
+        <p:txBody>
+          <a:bodyPr rtlCol="0" anchor="ctr"/>
+          <a:lstStyle/>
+          <a:p>
+            <a:pPr algn="ctr"/>
+          </a:p>
+        </p:txBody>
+      </p:sp>
+      <p:sp>
+        <p:nvSpPr>
+          <p:cNvPr id="22" name="TextBox 21"/>
+          <p:cNvSpPr txBox="1"/>
+          <p:nvPr/>
+        </p:nvSpPr>
+        <p:spPr>
+          <a:xfrm>
+            <a:off x="621792" y="2456697"/>
+            <a:ext cx="237744" cy="237744"/>
+          </a:xfrm>
+          <a:prstGeom prst="rect">
+            <a:avLst/>
+          </a:prstGeom>
+          <a:noFill/>
+        </p:spPr>
+        <p:txBody>
+          <a:bodyPr wrap="square" anchor="ctr" lIns="0" rIns="0" tIns="0" bIns="0">
+            <a:spAutoFit/>
+          </a:bodyPr>
+          <a:lstStyle/>
+          <a:p>
+            <a:pPr algn="ctr">
+              <a:lnSpc>
+                <a:spcPct val="114000"/>
+              </a:lnSpc>
+            </a:pPr>
+            <a:r>
+              <a:rPr sz="1000" b="1">
+                <a:solidFill>
+                  <a:srgbClr val="FFFFFF"/>
+                </a:solidFill>
+              </a:rPr>
+              <a:t>C</a:t>
+            </a:r>
+          </a:p>
+        </p:txBody>
+      </p:sp>
+      <p:sp>
+        <p:nvSpPr>
+          <p:cNvPr id="23" name="TextBox 22"/>
+          <p:cNvSpPr txBox="1"/>
+          <p:nvPr/>
+        </p:nvSpPr>
+        <p:spPr>
+          <a:xfrm>
+            <a:off x="932688" y="2438409"/>
+            <a:ext cx="8778240" cy="274320"/>
+          </a:xfrm>
+          <a:prstGeom prst="rect">
+            <a:avLst/>
+          </a:prstGeom>
+          <a:noFill/>
+        </p:spPr>
+        <p:txBody>
+          <a:bodyPr wrap="square" anchor="ctr" lIns="0" rIns="0" tIns="0" bIns="0">
+            <a:spAutoFit/>
+          </a:bodyPr>
+          <a:lstStyle/>
+          <a:p>
+            <a:pPr algn="l">
+              <a:lnSpc>
+                <a:spcPct val="114000"/>
+              </a:lnSpc>
+            </a:pPr>
+            <a:r>
+              <a:rPr sz="1050" b="1">
+                <a:solidFill>
+                  <a:srgbClr val="1B2B28"/>
+                </a:solidFill>
+              </a:rPr>
+              <a:t>良好</a:t>
+            </a:r>
+            <a:r>
+              <a:rPr sz="850" b="0">
+                <a:solidFill>
+                  <a:srgbClr val="5C6E6A"/>
+                </a:solidFill>
+              </a:rPr>
+              <a:t>   验收口径：</a:t>
+            </a:r>
+            <a:r>
+              <a:rPr sz="850" b="0">
+                <a:solidFill>
+                  <a:srgbClr val="5C6E6A"/>
+                </a:solidFill>
+              </a:rPr>
+              <a:t>数据字典完整；批量事务；溯源查询正确</a:t>
+            </a:r>
+          </a:p>
+        </p:txBody>
+      </p:sp>
+      <p:sp>
+        <p:nvSpPr>
+          <p:cNvPr id="24" name="Rounded Rectangle 23"/>
+          <p:cNvSpPr/>
+          <p:nvPr/>
+        </p:nvSpPr>
+        <p:spPr>
+          <a:xfrm>
+            <a:off x="11131803" y="2465841"/>
+            <a:ext cx="453644" cy="237744"/>
+          </a:xfrm>
+          <a:prstGeom prst="roundRect">
+            <a:avLst>
+              <a:gd name="adj" fmla="val 50000"/>
+            </a:avLst>
+          </a:prstGeom>
+          <a:solidFill>
+            <a:srgbClr val="0B5E54"/>
+          </a:solidFill>
+          <a:ln>
+            <a:noFill/>
+          </a:ln>
+          <a:effectLst/>
+        </p:spPr>
+        <p:style>
+          <a:lnRef idx="1">
+            <a:schemeClr val="accent1"/>
+          </a:lnRef>
+          <a:fillRef idx="3">
+            <a:schemeClr val="accent1"/>
+          </a:fillRef>
+          <a:effectRef idx="2">
+            <a:schemeClr val="accent1"/>
+          </a:effectRef>
+          <a:fontRef idx="minor">
+            <a:schemeClr val="lt1"/>
+          </a:fontRef>
+        </p:style>
+        <p:txBody>
+          <a:bodyPr rtlCol="0" anchor="ctr"/>
+          <a:lstStyle/>
+          <a:p>
+            <a:pPr algn="ctr"/>
+          </a:p>
+        </p:txBody>
+      </p:sp>
+      <p:sp>
+        <p:nvSpPr>
+          <p:cNvPr id="25" name="TextBox 24"/>
+          <p:cNvSpPr txBox="1"/>
+          <p:nvPr/>
+        </p:nvSpPr>
+        <p:spPr>
+          <a:xfrm>
+            <a:off x="11131803" y="2465841"/>
+            <a:ext cx="453644" cy="237744"/>
+          </a:xfrm>
+          <a:prstGeom prst="rect">
+            <a:avLst/>
+          </a:prstGeom>
+          <a:noFill/>
+        </p:spPr>
+        <p:txBody>
+          <a:bodyPr wrap="square" anchor="ctr" lIns="0" rIns="0" tIns="0" bIns="0">
+            <a:spAutoFit/>
+          </a:bodyPr>
+          <a:lstStyle/>
+          <a:p>
+            <a:pPr algn="ctr">
+              <a:lnSpc>
+                <a:spcPct val="114000"/>
+              </a:lnSpc>
+            </a:pPr>
+            <a:r>
+              <a:rPr sz="850" b="1">
+                <a:solidFill>
+                  <a:srgbClr val="FFFFFF"/>
+                </a:solidFill>
+              </a:rPr>
+              <a:t>达标</a:t>
+            </a:r>
+          </a:p>
+        </p:txBody>
+      </p:sp>
+      <p:sp>
+        <p:nvSpPr>
+          <p:cNvPr id="26" name="TextBox 25"/>
+          <p:cNvSpPr txBox="1"/>
+          <p:nvPr/>
+        </p:nvSpPr>
+        <p:spPr>
+          <a:xfrm>
+            <a:off x="932688" y="2721873"/>
+            <a:ext cx="10671047" cy="567940"/>
+          </a:xfrm>
+          <a:prstGeom prst="rect">
+            <a:avLst/>
+          </a:prstGeom>
+          <a:noFill/>
+        </p:spPr>
+        <p:txBody>
+          <a:bodyPr wrap="square" anchor="t" lIns="0" rIns="0" tIns="0" bIns="0">
+            <a:spAutoFit/>
+          </a:bodyPr>
+          <a:lstStyle/>
+          <a:p>
+            <a:pPr algn="l">
+              <a:lnSpc>
+                <a:spcPct val="114000"/>
+              </a:lnSpc>
+            </a:pPr>
+            <a:r>
+              <a:rPr sz="950" b="0">
+                <a:solidFill>
+                  <a:srgbClr val="1B2B28"/>
+                </a:solidFill>
+              </a:rPr>
+              <a:t>数据字典 18/18 列有成文含义（未登记:无）｜批量事务 bulk_save_objects 分批提交 15 次（种子 5＋缓冲 10，每批≤100 条）｜溯源 alarms→devices→points→records 四表 JOIN 命中 57/57 条告警、外键孤儿行 0（100.0%）</a:t>
+            </a:r>
+          </a:p>
+        </p:txBody>
+      </p:sp>
+      <p:sp>
+        <p:nvSpPr>
+          <p:cNvPr id="27" name="Rounded Rectangle 26"/>
+          <p:cNvSpPr/>
+          <p:nvPr/>
+        </p:nvSpPr>
+        <p:spPr>
+          <a:xfrm>
+            <a:off x="475488" y="3408686"/>
+            <a:ext cx="11237976" cy="970276"/>
+          </a:xfrm>
+          <a:prstGeom prst="roundRect">
+            <a:avLst>
+              <a:gd name="adj" fmla="val 6000"/>
+            </a:avLst>
+          </a:prstGeom>
+          <a:solidFill>
+            <a:srgbClr val="FFFFFF"/>
+          </a:solidFill>
+          <a:ln w="9525">
+            <a:solidFill>
+              <a:srgbClr val="E4F1EE"/>
+            </a:solidFill>
+          </a:ln>
+          <a:effectLst/>
+        </p:spPr>
+        <p:style>
+          <a:lnRef idx="1">
+            <a:schemeClr val="accent1"/>
+          </a:lnRef>
+          <a:fillRef idx="3">
+            <a:schemeClr val="accent1"/>
+          </a:fillRef>
+          <a:effectRef idx="2">
+            <a:schemeClr val="accent1"/>
+          </a:effectRef>
+          <a:fontRef idx="minor">
+            <a:schemeClr val="lt1"/>
+          </a:fontRef>
+        </p:style>
+        <p:txBody>
+          <a:bodyPr rtlCol="0" anchor="ctr"/>
+          <a:lstStyle/>
+          <a:p>
+            <a:pPr algn="ctr"/>
+          </a:p>
+        </p:txBody>
+      </p:sp>
+      <p:sp>
+        <p:nvSpPr>
+          <p:cNvPr id="28" name="Rounded Rectangle 27"/>
+          <p:cNvSpPr/>
+          <p:nvPr/>
+        </p:nvSpPr>
+        <p:spPr>
+          <a:xfrm>
+            <a:off x="475488" y="3408686"/>
+            <a:ext cx="54864" cy="970276"/>
+          </a:xfrm>
+          <a:prstGeom prst="roundRect">
+            <a:avLst>
+              <a:gd name="adj" fmla="val 50000"/>
+            </a:avLst>
+          </a:prstGeom>
+          <a:solidFill>
+            <a:srgbClr val="0B5E54"/>
+          </a:solidFill>
+          <a:ln>
+            <a:noFill/>
+          </a:ln>
+          <a:effectLst/>
+        </p:spPr>
+        <p:style>
+          <a:lnRef idx="1">
+            <a:schemeClr val="accent1"/>
+          </a:lnRef>
+          <a:fillRef idx="3">
+            <a:schemeClr val="accent1"/>
+          </a:fillRef>
+          <a:effectRef idx="2">
+            <a:schemeClr val="accent1"/>
+          </a:effectRef>
+          <a:fontRef idx="minor">
+            <a:schemeClr val="lt1"/>
+          </a:fontRef>
+        </p:style>
+        <p:txBody>
+          <a:bodyPr rtlCol="0" anchor="ctr"/>
+          <a:lstStyle/>
+          <a:p>
+            <a:pPr algn="ctr"/>
+          </a:p>
+        </p:txBody>
+      </p:sp>
+      <p:sp>
+        <p:nvSpPr>
+          <p:cNvPr id="29" name="Rounded Rectangle 28"/>
+          <p:cNvSpPr/>
+          <p:nvPr/>
+        </p:nvSpPr>
+        <p:spPr>
+          <a:xfrm>
+            <a:off x="621792" y="3490982"/>
+            <a:ext cx="237744" cy="237744"/>
+          </a:xfrm>
+          <a:prstGeom prst="roundRect">
+            <a:avLst>
+              <a:gd name="adj" fmla="val 28000"/>
+            </a:avLst>
+          </a:prstGeom>
+          <a:solidFill>
+            <a:srgbClr val="0B5E54"/>
+          </a:solidFill>
+          <a:ln>
+            <a:noFill/>
+          </a:ln>
+          <a:effectLst/>
+        </p:spPr>
+        <p:style>
+          <a:lnRef idx="1">
+            <a:schemeClr val="accent1"/>
+          </a:lnRef>
+          <a:fillRef idx="3">
+            <a:schemeClr val="accent1"/>
+          </a:fillRef>
+          <a:effectRef idx="2">
+            <a:schemeClr val="accent1"/>
+          </a:effectRef>
+          <a:fontRef idx="minor">
+            <a:schemeClr val="lt1"/>
+          </a:fontRef>
+        </p:style>
+        <p:txBody>
+          <a:bodyPr rtlCol="0" anchor="ctr"/>
+          <a:lstStyle/>
+          <a:p>
+            <a:pPr algn="ctr"/>
+          </a:p>
+        </p:txBody>
+      </p:sp>
+      <p:sp>
+        <p:nvSpPr>
+          <p:cNvPr id="30" name="TextBox 29"/>
+          <p:cNvSpPr txBox="1"/>
+          <p:nvPr/>
+        </p:nvSpPr>
+        <p:spPr>
+          <a:xfrm>
+            <a:off x="621792" y="3490982"/>
+            <a:ext cx="237744" cy="237744"/>
+          </a:xfrm>
+          <a:prstGeom prst="rect">
+            <a:avLst/>
+          </a:prstGeom>
+          <a:noFill/>
+        </p:spPr>
+        <p:txBody>
+          <a:bodyPr wrap="square" anchor="ctr" lIns="0" rIns="0" tIns="0" bIns="0">
+            <a:spAutoFit/>
+          </a:bodyPr>
+          <a:lstStyle/>
+          <a:p>
+            <a:pPr algn="ctr">
+              <a:lnSpc>
+                <a:spcPct val="114000"/>
+              </a:lnSpc>
+            </a:pPr>
+            <a:r>
+              <a:rPr sz="1000" b="1">
+                <a:solidFill>
+                  <a:srgbClr val="FFFFFF"/>
+                </a:solidFill>
+              </a:rPr>
+              <a:t>B</a:t>
+            </a:r>
+          </a:p>
+        </p:txBody>
+      </p:sp>
+      <p:sp>
+        <p:nvSpPr>
+          <p:cNvPr id="31" name="TextBox 30"/>
+          <p:cNvSpPr txBox="1"/>
+          <p:nvPr/>
+        </p:nvSpPr>
+        <p:spPr>
+          <a:xfrm>
+            <a:off x="932688" y="3472694"/>
+            <a:ext cx="8778240" cy="274320"/>
+          </a:xfrm>
+          <a:prstGeom prst="rect">
+            <a:avLst/>
+          </a:prstGeom>
+          <a:noFill/>
+        </p:spPr>
+        <p:txBody>
+          <a:bodyPr wrap="square" anchor="ctr" lIns="0" rIns="0" tIns="0" bIns="0">
+            <a:spAutoFit/>
+          </a:bodyPr>
+          <a:lstStyle/>
+          <a:p>
+            <a:pPr algn="l">
+              <a:lnSpc>
+                <a:spcPct val="114000"/>
+              </a:lnSpc>
+            </a:pPr>
+            <a:r>
+              <a:rPr sz="1050" b="1">
+                <a:solidFill>
+                  <a:srgbClr val="1B2B28"/>
+                </a:solidFill>
+              </a:rPr>
+              <a:t>优秀</a:t>
+            </a:r>
+            <a:r>
+              <a:rPr sz="850" b="0">
+                <a:solidFill>
+                  <a:srgbClr val="5C6E6A"/>
+                </a:solidFill>
+              </a:rPr>
+              <a:t>   验收口径：</a:t>
+            </a:r>
+            <a:r>
+              <a:rPr sz="850" b="0">
+                <a:solidFill>
+                  <a:srgbClr val="5C6E6A"/>
+                </a:solidFill>
+              </a:rPr>
+              <a:t>索引优化有EXPLAIN证据；N+1问题已规避</a:t>
+            </a:r>
+          </a:p>
+        </p:txBody>
+      </p:sp>
+      <p:sp>
+        <p:nvSpPr>
+          <p:cNvPr id="32" name="Rounded Rectangle 31"/>
+          <p:cNvSpPr/>
+          <p:nvPr/>
+        </p:nvSpPr>
+        <p:spPr>
+          <a:xfrm>
+            <a:off x="11131803" y="3500126"/>
+            <a:ext cx="453644" cy="237744"/>
+          </a:xfrm>
+          <a:prstGeom prst="roundRect">
+            <a:avLst>
+              <a:gd name="adj" fmla="val 50000"/>
+            </a:avLst>
+          </a:prstGeom>
+          <a:solidFill>
+            <a:srgbClr val="0B5E54"/>
+          </a:solidFill>
+          <a:ln>
+            <a:noFill/>
+          </a:ln>
+          <a:effectLst/>
+        </p:spPr>
+        <p:style>
+          <a:lnRef idx="1">
+            <a:schemeClr val="accent1"/>
+          </a:lnRef>
+          <a:fillRef idx="3">
+            <a:schemeClr val="accent1"/>
+          </a:fillRef>
+          <a:effectRef idx="2">
+            <a:schemeClr val="accent1"/>
+          </a:effectRef>
+          <a:fontRef idx="minor">
+            <a:schemeClr val="lt1"/>
+          </a:fontRef>
+        </p:style>
+        <p:txBody>
+          <a:bodyPr rtlCol="0" anchor="ctr"/>
+          <a:lstStyle/>
+          <a:p>
+            <a:pPr algn="ctr"/>
+          </a:p>
+        </p:txBody>
+      </p:sp>
+      <p:sp>
+        <p:nvSpPr>
+          <p:cNvPr id="33" name="TextBox 32"/>
+          <p:cNvSpPr txBox="1"/>
+          <p:nvPr/>
+        </p:nvSpPr>
+        <p:spPr>
+          <a:xfrm>
+            <a:off x="11131803" y="3500126"/>
+            <a:ext cx="453644" cy="237744"/>
+          </a:xfrm>
+          <a:prstGeom prst="rect">
+            <a:avLst/>
+          </a:prstGeom>
+          <a:noFill/>
+        </p:spPr>
+        <p:txBody>
+          <a:bodyPr wrap="square" anchor="ctr" lIns="0" rIns="0" tIns="0" bIns="0">
+            <a:spAutoFit/>
+          </a:bodyPr>
+          <a:lstStyle/>
+          <a:p>
+            <a:pPr algn="ctr">
+              <a:lnSpc>
+                <a:spcPct val="114000"/>
+              </a:lnSpc>
+            </a:pPr>
+            <a:r>
+              <a:rPr sz="850" b="1">
+                <a:solidFill>
+                  <a:srgbClr val="FFFFFF"/>
+                </a:solidFill>
+              </a:rPr>
+              <a:t>达标</a:t>
+            </a:r>
+          </a:p>
+        </p:txBody>
+      </p:sp>
+      <p:sp>
+        <p:nvSpPr>
+          <p:cNvPr id="34" name="TextBox 33"/>
+          <p:cNvSpPr txBox="1"/>
+          <p:nvPr/>
+        </p:nvSpPr>
+        <p:spPr>
+          <a:xfrm>
+            <a:off x="932688" y="3756158"/>
+            <a:ext cx="10671047" cy="567940"/>
+          </a:xfrm>
+          <a:prstGeom prst="rect">
+            <a:avLst/>
+          </a:prstGeom>
+          <a:noFill/>
+        </p:spPr>
+        <p:txBody>
+          <a:bodyPr wrap="square" anchor="t" lIns="0" rIns="0" tIns="0" bIns="0">
+            <a:spAutoFit/>
+          </a:bodyPr>
+          <a:lstStyle/>
+          <a:p>
+            <a:pPr algn="l">
+              <a:lnSpc>
+                <a:spcPct val="114000"/>
+              </a:lnSpc>
+            </a:pPr>
+            <a:r>
+              <a:rPr sz="950" b="0">
+                <a:solidFill>
+                  <a:srgbClr val="1B2B28"/>
+                </a:solidFill>
+              </a:rPr>
+              <a:t>bench_records 20000 行区间查询命中 240 行，建索引前全表 SCAN=是 → 建索引后 SEARCH USING INDEX=是（计划行见本报告「B层·索引优化」段，墙钟毫秒只写 runtime/bench.json 不入 output/）｜N+1 实测：懒加载 4 条 SELECT vs joinedload 1 条（3 台设备）</a:t>
+            </a:r>
+          </a:p>
+        </p:txBody>
+      </p:sp>
+      <p:sp>
+        <p:nvSpPr>
+          <p:cNvPr id="35" name="Rounded Rectangle 34"/>
+          <p:cNvSpPr/>
+          <p:nvPr/>
+        </p:nvSpPr>
+        <p:spPr>
+          <a:xfrm>
+            <a:off x="475488" y="4442971"/>
+            <a:ext cx="11237976" cy="970276"/>
+          </a:xfrm>
+          <a:prstGeom prst="roundRect">
+            <a:avLst>
+              <a:gd name="adj" fmla="val 6000"/>
+            </a:avLst>
+          </a:prstGeom>
+          <a:solidFill>
+            <a:srgbClr val="FFFFFF"/>
+          </a:solidFill>
+          <a:ln w="9525">
+            <a:solidFill>
+              <a:srgbClr val="E4F1EE"/>
+            </a:solidFill>
+          </a:ln>
+          <a:effectLst/>
+        </p:spPr>
+        <p:style>
+          <a:lnRef idx="1">
+            <a:schemeClr val="accent1"/>
+          </a:lnRef>
+          <a:fillRef idx="3">
+            <a:schemeClr val="accent1"/>
+          </a:fillRef>
+          <a:effectRef idx="2">
+            <a:schemeClr val="accent1"/>
+          </a:effectRef>
+          <a:fontRef idx="minor">
+            <a:schemeClr val="lt1"/>
+          </a:fontRef>
+        </p:style>
+        <p:txBody>
+          <a:bodyPr rtlCol="0" anchor="ctr"/>
+          <a:lstStyle/>
+          <a:p>
+            <a:pPr algn="ctr"/>
+          </a:p>
+        </p:txBody>
+      </p:sp>
+      <p:sp>
+        <p:nvSpPr>
+          <p:cNvPr id="36" name="Rounded Rectangle 35"/>
+          <p:cNvSpPr/>
+          <p:nvPr/>
+        </p:nvSpPr>
+        <p:spPr>
+          <a:xfrm>
+            <a:off x="475488" y="4442971"/>
+            <a:ext cx="54864" cy="970276"/>
+          </a:xfrm>
+          <a:prstGeom prst="roundRect">
+            <a:avLst>
+              <a:gd name="adj" fmla="val 50000"/>
+            </a:avLst>
+          </a:prstGeom>
+          <a:solidFill>
+            <a:srgbClr val="C9A227"/>
+          </a:solidFill>
+          <a:ln>
+            <a:noFill/>
+          </a:ln>
+          <a:effectLst/>
+        </p:spPr>
+        <p:style>
+          <a:lnRef idx="1">
+            <a:schemeClr val="accent1"/>
+          </a:lnRef>
+          <a:fillRef idx="3">
+            <a:schemeClr val="accent1"/>
+          </a:fillRef>
+          <a:effectRef idx="2">
+            <a:schemeClr val="accent1"/>
+          </a:effectRef>
+          <a:fontRef idx="minor">
+            <a:schemeClr val="lt1"/>
+          </a:fontRef>
+        </p:style>
+        <p:txBody>
+          <a:bodyPr rtlCol="0" anchor="ctr"/>
+          <a:lstStyle/>
+          <a:p>
+            <a:pPr algn="ctr"/>
+          </a:p>
+        </p:txBody>
+      </p:sp>
+      <p:sp>
+        <p:nvSpPr>
+          <p:cNvPr id="37" name="Rounded Rectangle 36"/>
+          <p:cNvSpPr/>
+          <p:nvPr/>
+        </p:nvSpPr>
+        <p:spPr>
+          <a:xfrm>
+            <a:off x="621792" y="4525267"/>
+            <a:ext cx="237744" cy="237744"/>
+          </a:xfrm>
+          <a:prstGeom prst="roundRect">
+            <a:avLst>
+              <a:gd name="adj" fmla="val 28000"/>
+            </a:avLst>
+          </a:prstGeom>
+          <a:solidFill>
+            <a:srgbClr val="C9A227"/>
+          </a:solidFill>
+          <a:ln>
+            <a:noFill/>
+          </a:ln>
+          <a:effectLst/>
+        </p:spPr>
+        <p:style>
+          <a:lnRef idx="1">
+            <a:schemeClr val="accent1"/>
+          </a:lnRef>
+          <a:fillRef idx="3">
+            <a:schemeClr val="accent1"/>
+          </a:fillRef>
+          <a:effectRef idx="2">
+            <a:schemeClr val="accent1"/>
+          </a:effectRef>
+          <a:fontRef idx="minor">
+            <a:schemeClr val="lt1"/>
+          </a:fontRef>
+        </p:style>
+        <p:txBody>
+          <a:bodyPr rtlCol="0" anchor="ctr"/>
+          <a:lstStyle/>
+          <a:p>
+            <a:pPr algn="ctr"/>
+          </a:p>
+        </p:txBody>
+      </p:sp>
+      <p:sp>
+        <p:nvSpPr>
+          <p:cNvPr id="38" name="TextBox 37"/>
+          <p:cNvSpPr txBox="1"/>
+          <p:nvPr/>
+        </p:nvSpPr>
+        <p:spPr>
+          <a:xfrm>
+            <a:off x="621792" y="4525267"/>
+            <a:ext cx="237744" cy="237744"/>
+          </a:xfrm>
+          <a:prstGeom prst="rect">
+            <a:avLst/>
+          </a:prstGeom>
+          <a:noFill/>
+        </p:spPr>
+        <p:txBody>
+          <a:bodyPr wrap="square" anchor="ctr" lIns="0" rIns="0" tIns="0" bIns="0">
+            <a:spAutoFit/>
+          </a:bodyPr>
+          <a:lstStyle/>
+          <a:p>
+            <a:pPr algn="ctr">
+              <a:lnSpc>
+                <a:spcPct val="114000"/>
+              </a:lnSpc>
+            </a:pPr>
+            <a:r>
+              <a:rPr sz="1000" b="1">
+                <a:solidFill>
+                  <a:srgbClr val="FFFFFF"/>
+                </a:solidFill>
+              </a:rPr>
+              <a:t>A</a:t>
+            </a:r>
+          </a:p>
+        </p:txBody>
+      </p:sp>
+      <p:sp>
+        <p:nvSpPr>
+          <p:cNvPr id="39" name="TextBox 38"/>
+          <p:cNvSpPr txBox="1"/>
+          <p:nvPr/>
+        </p:nvSpPr>
+        <p:spPr>
+          <a:xfrm>
+            <a:off x="932688" y="4506979"/>
+            <a:ext cx="8778240" cy="274320"/>
+          </a:xfrm>
+          <a:prstGeom prst="rect">
+            <a:avLst/>
+          </a:prstGeom>
+          <a:noFill/>
+        </p:spPr>
+        <p:txBody>
+          <a:bodyPr wrap="square" anchor="ctr" lIns="0" rIns="0" tIns="0" bIns="0">
+            <a:spAutoFit/>
+          </a:bodyPr>
+          <a:lstStyle/>
+          <a:p>
+            <a:pPr algn="l">
+              <a:lnSpc>
+                <a:spcPct val="114000"/>
+              </a:lnSpc>
+            </a:pPr>
+            <a:r>
+              <a:rPr sz="1050" b="1">
+                <a:solidFill>
+                  <a:srgbClr val="1B2B28"/>
+                </a:solidFill>
+              </a:rPr>
+              <a:t>超优</a:t>
+            </a:r>
+            <a:r>
+              <a:rPr sz="850" b="0">
+                <a:solidFill>
+                  <a:srgbClr val="5C6E6A"/>
+                </a:solidFill>
+              </a:rPr>
+              <a:t>   验收口径：</a:t>
+            </a:r>
+            <a:r>
+              <a:rPr sz="850" b="0">
+                <a:solidFill>
+                  <a:srgbClr val="5C6E6A"/>
+                </a:solidFill>
+              </a:rPr>
+              <a:t>优秀+复杂查询(多表JOIN聚合)+导入P3仪表盘形成闭环演示</a:t>
+            </a:r>
+          </a:p>
+        </p:txBody>
+      </p:sp>
+      <p:sp>
+        <p:nvSpPr>
+          <p:cNvPr id="40" name="Rounded Rectangle 39"/>
+          <p:cNvSpPr/>
+          <p:nvPr/>
+        </p:nvSpPr>
+        <p:spPr>
+          <a:xfrm>
+            <a:off x="11131803" y="4534411"/>
+            <a:ext cx="453644" cy="237744"/>
+          </a:xfrm>
+          <a:prstGeom prst="roundRect">
+            <a:avLst>
+              <a:gd name="adj" fmla="val 50000"/>
+            </a:avLst>
+          </a:prstGeom>
+          <a:solidFill>
+            <a:srgbClr val="0B5E54"/>
+          </a:solidFill>
+          <a:ln>
+            <a:noFill/>
+          </a:ln>
+          <a:effectLst/>
+        </p:spPr>
+        <p:style>
+          <a:lnRef idx="1">
+            <a:schemeClr val="accent1"/>
+          </a:lnRef>
+          <a:fillRef idx="3">
+            <a:schemeClr val="accent1"/>
+          </a:fillRef>
+          <a:effectRef idx="2">
+            <a:schemeClr val="accent1"/>
+          </a:effectRef>
+          <a:fontRef idx="minor">
+            <a:schemeClr val="lt1"/>
+          </a:fontRef>
+        </p:style>
+        <p:txBody>
+          <a:bodyPr rtlCol="0" anchor="ctr"/>
+          <a:lstStyle/>
+          <a:p>
+            <a:pPr algn="ctr"/>
+          </a:p>
+        </p:txBody>
+      </p:sp>
+      <p:sp>
+        <p:nvSpPr>
+          <p:cNvPr id="41" name="TextBox 40"/>
+          <p:cNvSpPr txBox="1"/>
+          <p:nvPr/>
+        </p:nvSpPr>
+        <p:spPr>
+          <a:xfrm>
+            <a:off x="11131803" y="4534411"/>
+            <a:ext cx="453644" cy="237744"/>
+          </a:xfrm>
+          <a:prstGeom prst="rect">
+            <a:avLst/>
+          </a:prstGeom>
+          <a:noFill/>
+        </p:spPr>
+        <p:txBody>
+          <a:bodyPr wrap="square" anchor="ctr" lIns="0" rIns="0" tIns="0" bIns="0">
+            <a:spAutoFit/>
+          </a:bodyPr>
+          <a:lstStyle/>
+          <a:p>
+            <a:pPr algn="ctr">
+              <a:lnSpc>
+                <a:spcPct val="114000"/>
+              </a:lnSpc>
+            </a:pPr>
+            <a:r>
+              <a:rPr sz="850" b="1">
+                <a:solidFill>
+                  <a:srgbClr val="FFFFFF"/>
+                </a:solidFill>
+              </a:rPr>
+              <a:t>达标</a:t>
+            </a:r>
+          </a:p>
+        </p:txBody>
+      </p:sp>
+      <p:sp>
+        <p:nvSpPr>
+          <p:cNvPr id="42" name="TextBox 41"/>
+          <p:cNvSpPr txBox="1"/>
+          <p:nvPr/>
+        </p:nvSpPr>
+        <p:spPr>
+          <a:xfrm>
+            <a:off x="932688" y="4790443"/>
+            <a:ext cx="10671047" cy="567940"/>
+          </a:xfrm>
+          <a:prstGeom prst="rect">
+            <a:avLst/>
+          </a:prstGeom>
+          <a:noFill/>
+        </p:spPr>
+        <p:txBody>
+          <a:bodyPr wrap="square" anchor="t" lIns="0" rIns="0" tIns="0" bIns="0">
+            <a:spAutoFit/>
+          </a:bodyPr>
+          <a:lstStyle/>
+          <a:p>
+            <a:pPr algn="l">
+              <a:lnSpc>
+                <a:spcPct val="114000"/>
+              </a:lnSpc>
+            </a:pPr>
+            <a:r>
+              <a:rPr sz="950" b="0">
+                <a:solidFill>
+                  <a:srgbClr val="1B2B28"/>
+                </a:solidFill>
+              </a:rPr>
+              <a:t>设备×小时四表 JOIN 聚合 36 桶（3 台设备），与逐行手算一致=是；窗口环比 12 桶 ORM=裸SQL 一致｜P3 交接文件 output/p3_dashboard_handoff.csv：36 行×6 列[ts/device_id/line/temp/vib/status]，时间解析失败 0 行、未知设备 0 个、缺列:无</a:t>
+            </a:r>
+          </a:p>
+        </p:txBody>
+      </p:sp>
+      <p:sp>
+        <p:nvSpPr>
+          <p:cNvPr id="43" name="Rounded Rectangle 42"/>
+          <p:cNvSpPr/>
+          <p:nvPr/>
+        </p:nvSpPr>
+        <p:spPr>
+          <a:xfrm>
+            <a:off x="475488" y="5477255"/>
+            <a:ext cx="11237976" cy="941832"/>
+          </a:xfrm>
+          <a:prstGeom prst="roundRect">
+            <a:avLst>
+              <a:gd name="adj" fmla="val 5000"/>
+            </a:avLst>
+          </a:prstGeom>
+          <a:solidFill>
+            <a:srgbClr val="E4F1EE"/>
+          </a:solidFill>
+          <a:ln>
+            <a:noFill/>
+          </a:ln>
+          <a:effectLst/>
+        </p:spPr>
+        <p:style>
+          <a:lnRef idx="1">
+            <a:schemeClr val="accent1"/>
+          </a:lnRef>
+          <a:fillRef idx="3">
+            <a:schemeClr val="accent1"/>
+          </a:fillRef>
+          <a:effectRef idx="2">
+            <a:schemeClr val="accent1"/>
+          </a:effectRef>
+          <a:fontRef idx="minor">
+            <a:schemeClr val="lt1"/>
+          </a:fontRef>
+        </p:style>
+        <p:txBody>
+          <a:bodyPr rtlCol="0" anchor="ctr"/>
+          <a:lstStyle/>
+          <a:p>
+            <a:pPr algn="ctr"/>
+          </a:p>
+        </p:txBody>
+      </p:sp>
+      <p:sp>
+        <p:nvSpPr>
+          <p:cNvPr id="44" name="Rounded Rectangle 43"/>
+          <p:cNvSpPr/>
+          <p:nvPr/>
+        </p:nvSpPr>
+        <p:spPr>
+          <a:xfrm>
+            <a:off x="475488" y="5477255"/>
+            <a:ext cx="54864" cy="941832"/>
+          </a:xfrm>
+          <a:prstGeom prst="roundRect">
+            <a:avLst>
+              <a:gd name="adj" fmla="val 50000"/>
+            </a:avLst>
+          </a:prstGeom>
+          <a:solidFill>
+            <a:srgbClr val="C9A227"/>
+          </a:solidFill>
+          <a:ln>
+            <a:noFill/>
+          </a:ln>
+          <a:effectLst/>
+        </p:spPr>
+        <p:style>
+          <a:lnRef idx="1">
+            <a:schemeClr val="accent1"/>
+          </a:lnRef>
+          <a:fillRef idx="3">
+            <a:schemeClr val="accent1"/>
+          </a:fillRef>
+          <a:effectRef idx="2">
+            <a:schemeClr val="accent1"/>
+          </a:effectRef>
+          <a:fontRef idx="minor">
+            <a:schemeClr val="lt1"/>
+          </a:fontRef>
+        </p:style>
+        <p:txBody>
+          <a:bodyPr rtlCol="0" anchor="ctr"/>
+          <a:lstStyle/>
+          <a:p>
+            <a:pPr algn="ctr"/>
+          </a:p>
+        </p:txBody>
+      </p:sp>
+      <p:sp>
+        <p:nvSpPr>
+          <p:cNvPr id="45" name="TextBox 44"/>
+          <p:cNvSpPr txBox="1"/>
+          <p:nvPr/>
+        </p:nvSpPr>
+        <p:spPr>
+          <a:xfrm>
+            <a:off x="676656" y="5550407"/>
+            <a:ext cx="10908792" cy="795528"/>
+          </a:xfrm>
+          <a:prstGeom prst="rect">
+            <a:avLst/>
+          </a:prstGeom>
+          <a:noFill/>
+        </p:spPr>
+        <p:txBody>
+          <a:bodyPr wrap="square" anchor="t" lIns="0" rIns="0" tIns="0" bIns="0">
+            <a:spAutoFit/>
+          </a:bodyPr>
+          <a:lstStyle/>
+          <a:p>
+            <a:pPr algn="l">
+              <a:lnSpc>
+                <a:spcPct val="124000"/>
+              </a:lnSpc>
+            </a:pPr>
+            <a:r>
+              <a:rPr sz="850" b="0">
+                <a:solidFill>
+                  <a:srgbClr val="1B2B28"/>
+                </a:solidFill>
+              </a:rPr>
+              <a:t>出处：工程化项目/p55_warehouse_orm/output/report.txt 第 139 节「分层达标」——本机 2026-10-28 05:08 实跑落盘，上表数字逐字摘录、未改写。</a:t>
+            </a:r>
+          </a:p>
+          <a:p>
+            <a:pPr algn="l">
+              <a:lnSpc>
+                <a:spcPct val="124000"/>
+              </a:lnSpc>
+            </a:pPr>
+            <a:r>
+              <a:rPr sz="850" b="0">
+                <a:solidFill>
+                  <a:srgbClr val="1B2B28"/>
+                </a:solidFill>
+              </a:rPr>
+              <a:t>复现：cd 工程化项目/p55_warehouse_orm &amp;&amp; python run.py &amp;&amp; python -m pytest -q -o addopts=''</a:t>
+            </a:r>
+          </a:p>
+          <a:p>
+            <a:pPr algn="l">
+              <a:lnSpc>
+                <a:spcPct val="124000"/>
+              </a:lnSpc>
+            </a:pPr>
+            <a:r>
+              <a:rPr sz="850" b="0">
+                <a:solidFill>
+                  <a:srgbClr val="1B2B28"/>
+                </a:solidFill>
+              </a:rPr>
+              <a:t>口径：表中「判定」沿用报告原词——绿=达标/通过，黄=仅本节取证项通过（未取证子项在报告里逐条点名），红=未达标。</a:t>
+            </a:r>
+          </a:p>
+        </p:txBody>
+      </p:sp>
+    </p:spTree>
+  </p:cSld>
+  <p:clrMapOvr>
+    <a:masterClrMapping/>
+  </p:clrMapOvr>
+</p:sld>
+</file>
+
+<file path=ppt/slides/slide65.xml><?xml version="1.0" encoding="utf-8"?>
+<p:sld xmlns:a="http://schemas.openxmlformats.org/drawingml/2006/main" xmlns:p="http://schemas.openxmlformats.org/presentationml/2006/main" xmlns:r="http://schemas.openxmlformats.org/officeDocument/2006/relationships">
+  <p:cSld>
+    <p:spTree>
+      <p:nvGrpSpPr>
+        <p:cNvPr id="1" name=""/>
+        <p:cNvGrpSpPr/>
+        <p:nvPr/>
+      </p:nvGrpSpPr>
+      <p:grpSpPr/>
+      <p:sp>
+        <p:nvSpPr>
+          <p:cNvPr id="2" name="Rounded Rectangle 1"/>
+          <p:cNvSpPr/>
+          <p:nvPr/>
+        </p:nvSpPr>
+        <p:spPr>
+          <a:xfrm>
+            <a:off x="0" y="0"/>
+            <a:ext cx="12191695" cy="64008"/>
+          </a:xfrm>
+          <a:prstGeom prst="roundRect">
+            <a:avLst>
+              <a:gd name="adj" fmla="val 50000"/>
+            </a:avLst>
+          </a:prstGeom>
+          <a:solidFill>
+            <a:srgbClr val="0B5E54"/>
+          </a:solidFill>
+          <a:ln>
+            <a:noFill/>
+          </a:ln>
+          <a:effectLst/>
+        </p:spPr>
+        <p:style>
+          <a:lnRef idx="1">
+            <a:schemeClr val="accent1"/>
+          </a:lnRef>
+          <a:fillRef idx="3">
+            <a:schemeClr val="accent1"/>
+          </a:fillRef>
+          <a:effectRef idx="2">
+            <a:schemeClr val="accent1"/>
+          </a:effectRef>
+          <a:fontRef idx="minor">
+            <a:schemeClr val="lt1"/>
+          </a:fontRef>
+        </p:style>
+        <p:txBody>
+          <a:bodyPr rtlCol="0" anchor="ctr"/>
+          <a:lstStyle/>
+          <a:p>
+            <a:pPr algn="ctr"/>
+          </a:p>
+        </p:txBody>
+      </p:sp>
+      <p:sp>
+        <p:nvSpPr>
+          <p:cNvPr id="3" name="TextBox 2"/>
+          <p:cNvSpPr txBox="1"/>
+          <p:nvPr/>
+        </p:nvSpPr>
+        <p:spPr>
+          <a:xfrm>
+            <a:off x="475488" y="146304"/>
+            <a:ext cx="8229600" cy="292608"/>
+          </a:xfrm>
+          <a:prstGeom prst="rect">
+            <a:avLst/>
+          </a:prstGeom>
+          <a:noFill/>
+        </p:spPr>
+        <p:txBody>
+          <a:bodyPr wrap="square" anchor="t" lIns="0" rIns="0" tIns="0" bIns="0">
+            <a:spAutoFit/>
+          </a:bodyPr>
+          <a:lstStyle/>
+          <a:p>
+            <a:pPr algn="l">
+              <a:lnSpc>
+                <a:spcPct val="114000"/>
+              </a:lnSpc>
+            </a:pPr>
+            <a:r>
+              <a:rPr sz="1100" b="1">
+                <a:solidFill>
+                  <a:srgbClr val="0B5E54"/>
+                </a:solidFill>
+              </a:rPr>
+              <a:t>工单实战 · 运行留证</a:t>
+            </a:r>
+          </a:p>
+        </p:txBody>
+      </p:sp>
+      <p:sp>
+        <p:nvSpPr>
+          <p:cNvPr id="4" name="Rounded Rectangle 3"/>
+          <p:cNvSpPr/>
+          <p:nvPr/>
+        </p:nvSpPr>
+        <p:spPr>
+          <a:xfrm>
+            <a:off x="475488" y="475488"/>
+            <a:ext cx="2027872" cy="310896"/>
+          </a:xfrm>
+          <a:prstGeom prst="roundRect">
+            <a:avLst>
+              <a:gd name="adj" fmla="val 50000"/>
+            </a:avLst>
+          </a:prstGeom>
+          <a:solidFill>
+            <a:srgbClr val="C9A227"/>
+          </a:solidFill>
+          <a:ln>
+            <a:noFill/>
+          </a:ln>
+          <a:effectLst/>
+        </p:spPr>
+        <p:style>
+          <a:lnRef idx="1">
+            <a:schemeClr val="accent1"/>
+          </a:lnRef>
+          <a:fillRef idx="3">
+            <a:schemeClr val="accent1"/>
+          </a:fillRef>
+          <a:effectRef idx="2">
+            <a:schemeClr val="accent1"/>
+          </a:effectRef>
+          <a:fontRef idx="minor">
+            <a:schemeClr val="lt1"/>
+          </a:fontRef>
+        </p:style>
+        <p:txBody>
+          <a:bodyPr rtlCol="0" anchor="ctr"/>
+          <a:lstStyle/>
+          <a:p>
+            <a:pPr algn="ctr"/>
+          </a:p>
+        </p:txBody>
+      </p:sp>
+      <p:sp>
+        <p:nvSpPr>
+          <p:cNvPr id="5" name="TextBox 4"/>
+          <p:cNvSpPr txBox="1"/>
+          <p:nvPr/>
+        </p:nvSpPr>
+        <p:spPr>
+          <a:xfrm>
+            <a:off x="475488" y="475488"/>
+            <a:ext cx="2027872" cy="310896"/>
+          </a:xfrm>
+          <a:prstGeom prst="rect">
+            <a:avLst/>
+          </a:prstGeom>
+          <a:noFill/>
+        </p:spPr>
+        <p:txBody>
+          <a:bodyPr wrap="square" anchor="ctr" lIns="0" rIns="0" tIns="0" bIns="0">
+            <a:spAutoFit/>
+          </a:bodyPr>
+          <a:lstStyle/>
+          <a:p>
+            <a:pPr algn="ctr">
+              <a:lnSpc>
+                <a:spcPct val="114000"/>
+              </a:lnSpc>
+            </a:pPr>
+            <a:r>
+              <a:rPr sz="1050" b="1">
+                <a:solidFill>
+                  <a:srgbClr val="FFFFFF"/>
+                </a:solidFill>
+              </a:rPr>
+              <a:t>SCREENSHOT · 终端逐字截图</a:t>
+            </a:r>
+          </a:p>
+        </p:txBody>
+      </p:sp>
+      <p:sp>
+        <p:nvSpPr>
+          <p:cNvPr id="6" name="TextBox 5"/>
+          <p:cNvSpPr txBox="1"/>
+          <p:nvPr/>
+        </p:nvSpPr>
+        <p:spPr>
+          <a:xfrm>
+            <a:off x="475488" y="859536"/>
+            <a:ext cx="11237976" cy="502920"/>
+          </a:xfrm>
+          <a:prstGeom prst="rect">
+            <a:avLst/>
+          </a:prstGeom>
+          <a:noFill/>
+        </p:spPr>
+        <p:txBody>
+          <a:bodyPr wrap="square" anchor="t" lIns="0" rIns="0" tIns="0" bIns="0">
+            <a:spAutoFit/>
+          </a:bodyPr>
+          <a:lstStyle/>
+          <a:p>
+            <a:pPr algn="l">
+              <a:lnSpc>
+                <a:spcPct val="114000"/>
+              </a:lnSpc>
+            </a:pPr>
+            <a:r>
+              <a:rPr sz="2200" b="1">
+                <a:solidFill>
+                  <a:srgbClr val="1B2B28"/>
+                </a:solidFill>
+              </a:rPr>
+              <a:t>P5.1/P5.2 分层达标 · 四档逐字输出截图</a:t>
+            </a:r>
+          </a:p>
+        </p:txBody>
+      </p:sp>
+      <p:sp>
+        <p:nvSpPr>
+          <p:cNvPr id="7" name="Rounded Rectangle 6"/>
+          <p:cNvSpPr/>
+          <p:nvPr/>
+        </p:nvSpPr>
+        <p:spPr>
+          <a:xfrm>
+            <a:off x="475488" y="1389888"/>
+            <a:ext cx="1234440" cy="27432"/>
+          </a:xfrm>
+          <a:prstGeom prst="roundRect">
+            <a:avLst>
+              <a:gd name="adj" fmla="val 50000"/>
+            </a:avLst>
+          </a:prstGeom>
+          <a:solidFill>
+            <a:srgbClr val="C9A227"/>
+          </a:solidFill>
+          <a:ln>
+            <a:noFill/>
+          </a:ln>
+          <a:effectLst/>
+        </p:spPr>
+        <p:style>
+          <a:lnRef idx="1">
+            <a:schemeClr val="accent1"/>
+          </a:lnRef>
+          <a:fillRef idx="3">
+            <a:schemeClr val="accent1"/>
+          </a:fillRef>
+          <a:effectRef idx="2">
+            <a:schemeClr val="accent1"/>
+          </a:effectRef>
+          <a:fontRef idx="minor">
+            <a:schemeClr val="lt1"/>
+          </a:fontRef>
+        </p:style>
+        <p:txBody>
+          <a:bodyPr rtlCol="0" anchor="ctr"/>
+          <a:lstStyle/>
+          <a:p>
+            <a:pPr algn="ctr"/>
+          </a:p>
+        </p:txBody>
+      </p:sp>
+      <p:sp>
+        <p:nvSpPr>
+          <p:cNvPr id="8" name="Rounded Rectangle 7"/>
+          <p:cNvSpPr/>
+          <p:nvPr/>
+        </p:nvSpPr>
+        <p:spPr>
+          <a:xfrm>
+            <a:off x="475488" y="6419088"/>
+            <a:ext cx="11237976" cy="10972"/>
+          </a:xfrm>
+          <a:prstGeom prst="roundRect">
+            <a:avLst>
+              <a:gd name="adj" fmla="val 50000"/>
+            </a:avLst>
+          </a:prstGeom>
+          <a:solidFill>
+            <a:srgbClr val="E4F1EE"/>
+          </a:solidFill>
+          <a:ln>
+            <a:noFill/>
+          </a:ln>
+          <a:effectLst/>
+        </p:spPr>
+        <p:style>
+          <a:lnRef idx="1">
+            <a:schemeClr val="accent1"/>
+          </a:lnRef>
+          <a:fillRef idx="3">
+            <a:schemeClr val="accent1"/>
+          </a:fillRef>
+          <a:effectRef idx="2">
+            <a:schemeClr val="accent1"/>
+          </a:effectRef>
+          <a:fontRef idx="minor">
+            <a:schemeClr val="lt1"/>
+          </a:fontRef>
+        </p:style>
+        <p:txBody>
+          <a:bodyPr rtlCol="0" anchor="ctr"/>
+          <a:lstStyle/>
+          <a:p>
+            <a:pPr algn="ctr"/>
+          </a:p>
+        </p:txBody>
+      </p:sp>
+      <p:sp>
+        <p:nvSpPr>
+          <p:cNvPr id="9" name="TextBox 8"/>
+          <p:cNvSpPr txBox="1"/>
+          <p:nvPr/>
+        </p:nvSpPr>
+        <p:spPr>
+          <a:xfrm>
+            <a:off x="475488" y="6455664"/>
+            <a:ext cx="7315200" cy="292608"/>
+          </a:xfrm>
+          <a:prstGeom prst="rect">
+            <a:avLst/>
+          </a:prstGeom>
+          <a:noFill/>
+        </p:spPr>
+        <p:txBody>
+          <a:bodyPr wrap="square" anchor="t" lIns="0" rIns="0" tIns="0" bIns="0">
+            <a:spAutoFit/>
+          </a:bodyPr>
+          <a:lstStyle/>
+          <a:p>
+            <a:pPr algn="l">
+              <a:lnSpc>
+                <a:spcPct val="114000"/>
+              </a:lnSpc>
+            </a:pPr>
+            <a:r>
+              <a:rPr sz="900" b="0">
+                <a:solidFill>
+                  <a:srgbClr val="5C6E6A"/>
+                </a:solidFill>
+              </a:rPr>
+              <a:t>两江智造集团 · Python程序设计（项目实战）</a:t>
+            </a:r>
+          </a:p>
+        </p:txBody>
+      </p:sp>
+      <p:sp>
+        <p:nvSpPr>
+          <p:cNvPr id="10" name="TextBox 9"/>
+          <p:cNvSpPr txBox="1"/>
+          <p:nvPr/>
+        </p:nvSpPr>
+        <p:spPr>
+          <a:xfrm>
+            <a:off x="10597896" y="6537960"/>
+            <a:ext cx="996696" cy="301752"/>
+          </a:xfrm>
+          <a:prstGeom prst="rect">
+            <a:avLst/>
+          </a:prstGeom>
+          <a:noFill/>
+        </p:spPr>
+        <p:txBody>
+          <a:bodyPr wrap="square" anchor="t" lIns="0" rIns="0" tIns="0" bIns="0">
+            <a:spAutoFit/>
+          </a:bodyPr>
+          <a:lstStyle/>
+          <a:p>
+            <a:pPr algn="r">
+              <a:lnSpc>
+                <a:spcPct val="114000"/>
+              </a:lnSpc>
+            </a:pPr>
+            <a:r>
+              <a:rPr sz="1000" b="0">
+                <a:solidFill>
+                  <a:srgbClr val="8A97B5"/>
+                </a:solidFill>
+              </a:rPr>
+              <a:t>50 / 66</a:t>
+            </a:r>
+          </a:p>
+        </p:txBody>
+      </p:sp>
+      <p:sp>
+        <p:nvSpPr>
+          <p:cNvPr id="11" name="TextBox 10"/>
+          <p:cNvSpPr txBox="1"/>
+          <p:nvPr/>
+        </p:nvSpPr>
+        <p:spPr>
+          <a:xfrm>
+            <a:off x="475488" y="1517904"/>
+            <a:ext cx="11237976" cy="237744"/>
+          </a:xfrm>
+          <a:prstGeom prst="rect">
+            <a:avLst/>
+          </a:prstGeom>
+          <a:noFill/>
+        </p:spPr>
+        <p:txBody>
+          <a:bodyPr wrap="square" anchor="t" lIns="0" rIns="0" tIns="0" bIns="0">
+            <a:spAutoFit/>
+          </a:bodyPr>
+          <a:lstStyle/>
+          <a:p>
+            <a:pPr algn="l">
+              <a:lnSpc>
+                <a:spcPct val="114000"/>
+              </a:lnSpc>
+            </a:pPr>
+            <a:r>
+              <a:rPr sz="1000" b="0">
+                <a:solidFill>
+                  <a:srgbClr val="5C6E6A"/>
+                </a:solidFill>
+              </a:rPr>
+              <a:t>终端窗口截图：由 report.txt 本节逐字渲染，未手工改写</a:t>
+            </a:r>
+          </a:p>
+        </p:txBody>
+      </p:sp>
+      <p:pic>
+        <p:nvPicPr>
+          <p:cNvPr id="12" name="Picture 11" descr="p55_warehouse_orm_classroom.png"/>
+          <p:cNvPicPr>
+            <a:picLocks noChangeAspect="1"/>
+          </p:cNvPicPr>
+          <p:nvPr/>
+        </p:nvPicPr>
+        <p:blipFill>
+          <a:blip r:embed="rId2"/>
+          <a:stretch>
+            <a:fillRect/>
+          </a:stretch>
+        </p:blipFill>
+        <p:spPr>
+          <a:xfrm>
+            <a:off x="475488" y="1823437"/>
+            <a:ext cx="11237976" cy="3787198"/>
+          </a:xfrm>
+          <a:prstGeom prst="rect">
+            <a:avLst/>
+          </a:prstGeom>
+        </p:spPr>
+      </p:pic>
+      <p:sp>
+        <p:nvSpPr>
+          <p:cNvPr id="13" name="TextBox 12"/>
+          <p:cNvSpPr txBox="1"/>
+          <p:nvPr/>
+        </p:nvSpPr>
+        <p:spPr>
+          <a:xfrm>
+            <a:off x="475488" y="5647210"/>
+            <a:ext cx="11237976" cy="256032"/>
+          </a:xfrm>
+          <a:prstGeom prst="rect">
+            <a:avLst/>
+          </a:prstGeom>
+          <a:noFill/>
+        </p:spPr>
+        <p:txBody>
+          <a:bodyPr wrap="square" anchor="t" lIns="0" rIns="0" tIns="0" bIns="0">
+            <a:spAutoFit/>
+          </a:bodyPr>
+          <a:lstStyle/>
+          <a:p>
+            <a:pPr algn="l">
+              <a:lnSpc>
+                <a:spcPct val="114000"/>
+              </a:lnSpc>
+            </a:pPr>
+            <a:r>
+              <a:rPr sz="850" b="0">
+                <a:solidFill>
+                  <a:srgbClr val="5C6E6A"/>
+                </a:solidFill>
+              </a:rPr>
+              <a:t>▲ p55_warehouse_orm：分层达标 第 139 行起的四档逐字原文（绿=达标/通过，黄=仅本节取证项，橙=未实测项）</a:t>
+            </a:r>
+          </a:p>
+        </p:txBody>
+      </p:sp>
+    </p:spTree>
+  </p:cSld>
+  <p:clrMapOvr>
+    <a:masterClrMapping/>
+  </p:clrMapOvr>
+</p:sld>
+</file>
+
+<file path=ppt/slides/slide66.xml><?xml version="1.0" encoding="utf-8"?>
+<p:sld xmlns:a="http://schemas.openxmlformats.org/drawingml/2006/main" xmlns:p="http://schemas.openxmlformats.org/presentationml/2006/main" xmlns:r="http://schemas.openxmlformats.org/officeDocument/2006/relationships">
+  <p:cSld>
+    <p:spTree>
+      <p:nvGrpSpPr>
+        <p:cNvPr id="1" name=""/>
+        <p:cNvGrpSpPr/>
+        <p:nvPr/>
+      </p:nvGrpSpPr>
+      <p:grpSpPr/>
+      <p:sp>
+        <p:nvSpPr>
+          <p:cNvPr id="2" name="Rounded Rectangle 1"/>
+          <p:cNvSpPr/>
+          <p:nvPr/>
+        </p:nvSpPr>
+        <p:spPr>
+          <a:xfrm>
+            <a:off x="0" y="0"/>
+            <a:ext cx="12191695" cy="64008"/>
+          </a:xfrm>
+          <a:prstGeom prst="roundRect">
+            <a:avLst>
+              <a:gd name="adj" fmla="val 50000"/>
+            </a:avLst>
+          </a:prstGeom>
+          <a:solidFill>
+            <a:srgbClr val="0B5E54"/>
+          </a:solidFill>
+          <a:ln>
+            <a:noFill/>
+          </a:ln>
+          <a:effectLst/>
+        </p:spPr>
+        <p:style>
+          <a:lnRef idx="1">
+            <a:schemeClr val="accent1"/>
+          </a:lnRef>
+          <a:fillRef idx="3">
+            <a:schemeClr val="accent1"/>
+          </a:fillRef>
+          <a:effectRef idx="2">
+            <a:schemeClr val="accent1"/>
+          </a:effectRef>
+          <a:fontRef idx="minor">
+            <a:schemeClr val="lt1"/>
+          </a:fontRef>
+        </p:style>
+        <p:txBody>
+          <a:bodyPr rtlCol="0" anchor="ctr"/>
+          <a:lstStyle/>
+          <a:p>
+            <a:pPr algn="ctr"/>
+          </a:p>
+        </p:txBody>
+      </p:sp>
+      <p:sp>
+        <p:nvSpPr>
+          <p:cNvPr id="3" name="TextBox 2"/>
+          <p:cNvSpPr txBox="1"/>
+          <p:nvPr/>
+        </p:nvSpPr>
+        <p:spPr>
+          <a:xfrm>
+            <a:off x="475488" y="146304"/>
+            <a:ext cx="8229600" cy="292608"/>
+          </a:xfrm>
+          <a:prstGeom prst="rect">
+            <a:avLst/>
+          </a:prstGeom>
+          <a:noFill/>
+        </p:spPr>
+        <p:txBody>
+          <a:bodyPr wrap="square" anchor="t" lIns="0" rIns="0" tIns="0" bIns="0">
+            <a:spAutoFit/>
+          </a:bodyPr>
+          <a:lstStyle/>
+          <a:p>
+            <a:pPr algn="l">
+              <a:lnSpc>
+                <a:spcPct val="114000"/>
+              </a:lnSpc>
+            </a:pPr>
+            <a:r>
+              <a:rPr sz="1100" b="1">
+                <a:solidFill>
+                  <a:srgbClr val="0B5E54"/>
+                </a:solidFill>
+              </a:rPr>
+              <a:t>工单实战 · 运行留证</a:t>
+            </a:r>
+          </a:p>
+        </p:txBody>
+      </p:sp>
+      <p:sp>
+        <p:nvSpPr>
+          <p:cNvPr id="4" name="Rounded Rectangle 3"/>
+          <p:cNvSpPr/>
+          <p:nvPr/>
+        </p:nvSpPr>
+        <p:spPr>
+          <a:xfrm>
+            <a:off x="475488" y="475488"/>
+            <a:ext cx="2027872" cy="310896"/>
+          </a:xfrm>
+          <a:prstGeom prst="roundRect">
+            <a:avLst>
+              <a:gd name="adj" fmla="val 50000"/>
+            </a:avLst>
+          </a:prstGeom>
+          <a:solidFill>
+            <a:srgbClr val="C9A227"/>
+          </a:solidFill>
+          <a:ln>
+            <a:noFill/>
+          </a:ln>
+          <a:effectLst/>
+        </p:spPr>
+        <p:style>
+          <a:lnRef idx="1">
+            <a:schemeClr val="accent1"/>
+          </a:lnRef>
+          <a:fillRef idx="3">
+            <a:schemeClr val="accent1"/>
+          </a:fillRef>
+          <a:effectRef idx="2">
+            <a:schemeClr val="accent1"/>
+          </a:effectRef>
+          <a:fontRef idx="minor">
+            <a:schemeClr val="lt1"/>
+          </a:fontRef>
+        </p:style>
+        <p:txBody>
+          <a:bodyPr rtlCol="0" anchor="ctr"/>
+          <a:lstStyle/>
+          <a:p>
+            <a:pPr algn="ctr"/>
+          </a:p>
+        </p:txBody>
+      </p:sp>
+      <p:sp>
+        <p:nvSpPr>
+          <p:cNvPr id="5" name="TextBox 4"/>
+          <p:cNvSpPr txBox="1"/>
+          <p:nvPr/>
+        </p:nvSpPr>
+        <p:spPr>
+          <a:xfrm>
+            <a:off x="475488" y="475488"/>
+            <a:ext cx="2027872" cy="310896"/>
+          </a:xfrm>
+          <a:prstGeom prst="rect">
+            <a:avLst/>
+          </a:prstGeom>
+          <a:noFill/>
+        </p:spPr>
+        <p:txBody>
+          <a:bodyPr wrap="square" anchor="ctr" lIns="0" rIns="0" tIns="0" bIns="0">
+            <a:spAutoFit/>
+          </a:bodyPr>
+          <a:lstStyle/>
+          <a:p>
+            <a:pPr algn="ctr">
+              <a:lnSpc>
+                <a:spcPct val="114000"/>
+              </a:lnSpc>
+            </a:pPr>
+            <a:r>
+              <a:rPr sz="1050" b="1">
+                <a:solidFill>
+                  <a:srgbClr val="FFFFFF"/>
+                </a:solidFill>
+              </a:rPr>
+              <a:t>SCREENSHOT · 终端逐字截图</a:t>
+            </a:r>
+          </a:p>
+        </p:txBody>
+      </p:sp>
+      <p:sp>
+        <p:nvSpPr>
+          <p:cNvPr id="6" name="TextBox 5"/>
+          <p:cNvSpPr txBox="1"/>
+          <p:nvPr/>
+        </p:nvSpPr>
+        <p:spPr>
+          <a:xfrm>
+            <a:off x="475488" y="859536"/>
+            <a:ext cx="11237976" cy="502920"/>
+          </a:xfrm>
+          <a:prstGeom prst="rect">
+            <a:avLst/>
+          </a:prstGeom>
+          <a:noFill/>
+        </p:spPr>
+        <p:txBody>
+          <a:bodyPr wrap="square" anchor="t" lIns="0" rIns="0" tIns="0" bIns="0">
+            <a:spAutoFit/>
+          </a:bodyPr>
+          <a:lstStyle/>
+          <a:p>
+            <a:pPr algn="l">
+              <a:lnSpc>
+                <a:spcPct val="114000"/>
+              </a:lnSpc>
+            </a:pPr>
+            <a:r>
+              <a:rPr sz="2200" b="1">
+                <a:solidFill>
+                  <a:srgbClr val="1B2B28"/>
+                </a:solidFill>
+              </a:rPr>
+              <a:t>P5.1/P5.2 · 测试全绿证据＋pytest 全量实跑</a:t>
+            </a:r>
+          </a:p>
+        </p:txBody>
+      </p:sp>
+      <p:sp>
+        <p:nvSpPr>
+          <p:cNvPr id="7" name="Rounded Rectangle 6"/>
+          <p:cNvSpPr/>
+          <p:nvPr/>
+        </p:nvSpPr>
+        <p:spPr>
+          <a:xfrm>
+            <a:off x="475488" y="1389888"/>
+            <a:ext cx="1234440" cy="27432"/>
+          </a:xfrm>
+          <a:prstGeom prst="roundRect">
+            <a:avLst>
+              <a:gd name="adj" fmla="val 50000"/>
+            </a:avLst>
+          </a:prstGeom>
+          <a:solidFill>
+            <a:srgbClr val="C9A227"/>
+          </a:solidFill>
+          <a:ln>
+            <a:noFill/>
+          </a:ln>
+          <a:effectLst/>
+        </p:spPr>
+        <p:style>
+          <a:lnRef idx="1">
+            <a:schemeClr val="accent1"/>
+          </a:lnRef>
+          <a:fillRef idx="3">
+            <a:schemeClr val="accent1"/>
+          </a:fillRef>
+          <a:effectRef idx="2">
+            <a:schemeClr val="accent1"/>
+          </a:effectRef>
+          <a:fontRef idx="minor">
+            <a:schemeClr val="lt1"/>
+          </a:fontRef>
+        </p:style>
+        <p:txBody>
+          <a:bodyPr rtlCol="0" anchor="ctr"/>
+          <a:lstStyle/>
+          <a:p>
+            <a:pPr algn="ctr"/>
+          </a:p>
+        </p:txBody>
+      </p:sp>
+      <p:sp>
+        <p:nvSpPr>
+          <p:cNvPr id="8" name="Rounded Rectangle 7"/>
+          <p:cNvSpPr/>
+          <p:nvPr/>
+        </p:nvSpPr>
+        <p:spPr>
+          <a:xfrm>
+            <a:off x="475488" y="6419088"/>
+            <a:ext cx="11237976" cy="10972"/>
+          </a:xfrm>
+          <a:prstGeom prst="roundRect">
+            <a:avLst>
+              <a:gd name="adj" fmla="val 50000"/>
+            </a:avLst>
+          </a:prstGeom>
+          <a:solidFill>
+            <a:srgbClr val="E4F1EE"/>
+          </a:solidFill>
+          <a:ln>
+            <a:noFill/>
+          </a:ln>
+          <a:effectLst/>
+        </p:spPr>
+        <p:style>
+          <a:lnRef idx="1">
+            <a:schemeClr val="accent1"/>
+          </a:lnRef>
+          <a:fillRef idx="3">
+            <a:schemeClr val="accent1"/>
+          </a:fillRef>
+          <a:effectRef idx="2">
+            <a:schemeClr val="accent1"/>
+          </a:effectRef>
+          <a:fontRef idx="minor">
+            <a:schemeClr val="lt1"/>
+          </a:fontRef>
+        </p:style>
+        <p:txBody>
+          <a:bodyPr rtlCol="0" anchor="ctr"/>
+          <a:lstStyle/>
+          <a:p>
+            <a:pPr algn="ctr"/>
+          </a:p>
+        </p:txBody>
+      </p:sp>
+      <p:sp>
+        <p:nvSpPr>
+          <p:cNvPr id="9" name="TextBox 8"/>
+          <p:cNvSpPr txBox="1"/>
+          <p:nvPr/>
+        </p:nvSpPr>
+        <p:spPr>
+          <a:xfrm>
+            <a:off x="475488" y="6455664"/>
+            <a:ext cx="7315200" cy="292608"/>
+          </a:xfrm>
+          <a:prstGeom prst="rect">
+            <a:avLst/>
+          </a:prstGeom>
+          <a:noFill/>
+        </p:spPr>
+        <p:txBody>
+          <a:bodyPr wrap="square" anchor="t" lIns="0" rIns="0" tIns="0" bIns="0">
+            <a:spAutoFit/>
+          </a:bodyPr>
+          <a:lstStyle/>
+          <a:p>
+            <a:pPr algn="l">
+              <a:lnSpc>
+                <a:spcPct val="114000"/>
+              </a:lnSpc>
+            </a:pPr>
+            <a:r>
+              <a:rPr sz="900" b="0">
+                <a:solidFill>
+                  <a:srgbClr val="5C6E6A"/>
+                </a:solidFill>
+              </a:rPr>
+              <a:t>两江智造集团 · Python程序设计（项目实战）</a:t>
+            </a:r>
+          </a:p>
+        </p:txBody>
+      </p:sp>
+      <p:sp>
+        <p:nvSpPr>
+          <p:cNvPr id="10" name="TextBox 9"/>
+          <p:cNvSpPr txBox="1"/>
+          <p:nvPr/>
+        </p:nvSpPr>
+        <p:spPr>
+          <a:xfrm>
+            <a:off x="10597896" y="6537960"/>
+            <a:ext cx="996696" cy="301752"/>
+          </a:xfrm>
+          <a:prstGeom prst="rect">
+            <a:avLst/>
+          </a:prstGeom>
+          <a:noFill/>
+        </p:spPr>
+        <p:txBody>
+          <a:bodyPr wrap="square" anchor="t" lIns="0" rIns="0" tIns="0" bIns="0">
+            <a:spAutoFit/>
+          </a:bodyPr>
+          <a:lstStyle/>
+          <a:p>
+            <a:pPr algn="r">
+              <a:lnSpc>
+                <a:spcPct val="114000"/>
+              </a:lnSpc>
+            </a:pPr>
+            <a:r>
+              <a:rPr sz="1000" b="0">
+                <a:solidFill>
+                  <a:srgbClr val="8A97B5"/>
+                </a:solidFill>
+              </a:rPr>
+              <a:t>51 / 66</a:t>
+            </a:r>
+          </a:p>
+        </p:txBody>
+      </p:sp>
+      <p:sp>
+        <p:nvSpPr>
+          <p:cNvPr id="11" name="TextBox 10"/>
+          <p:cNvSpPr txBox="1"/>
+          <p:nvPr/>
+        </p:nvSpPr>
+        <p:spPr>
+          <a:xfrm>
+            <a:off x="475488" y="1517904"/>
+            <a:ext cx="11237976" cy="237744"/>
+          </a:xfrm>
+          <a:prstGeom prst="rect">
+            <a:avLst/>
+          </a:prstGeom>
+          <a:noFill/>
+        </p:spPr>
+        <p:txBody>
+          <a:bodyPr wrap="square" anchor="t" lIns="0" rIns="0" tIns="0" bIns="0">
+            <a:spAutoFit/>
+          </a:bodyPr>
+          <a:lstStyle/>
+          <a:p>
+            <a:pPr algn="l">
+              <a:lnSpc>
+                <a:spcPct val="114000"/>
+              </a:lnSpc>
+            </a:pPr>
+            <a:r>
+              <a:rPr sz="1000" b="0">
+                <a:solidFill>
+                  <a:srgbClr val="5C6E6A"/>
+                </a:solidFill>
+              </a:rPr>
+              <a:t>pytest 全量实跑：本机真实运行输出，非示例、非节选</a:t>
+            </a:r>
+          </a:p>
+        </p:txBody>
+      </p:sp>
+      <p:pic>
+        <p:nvPicPr>
+          <p:cNvPr id="12" name="Picture 11" descr="p55_warehouse_orm_pytest.png"/>
+          <p:cNvPicPr>
+            <a:picLocks noChangeAspect="1"/>
+          </p:cNvPicPr>
+          <p:nvPr/>
+        </p:nvPicPr>
+        <p:blipFill>
+          <a:blip r:embed="rId2"/>
+          <a:stretch>
+            <a:fillRect/>
+          </a:stretch>
+        </p:blipFill>
+        <p:spPr>
+          <a:xfrm>
+            <a:off x="475488" y="2490034"/>
+            <a:ext cx="11237976" cy="1539603"/>
+          </a:xfrm>
+          <a:prstGeom prst="rect">
+            <a:avLst/>
+          </a:prstGeom>
+        </p:spPr>
+      </p:pic>
+      <p:sp>
+        <p:nvSpPr>
+          <p:cNvPr id="13" name="TextBox 12"/>
+          <p:cNvSpPr txBox="1"/>
+          <p:nvPr/>
+        </p:nvSpPr>
+        <p:spPr>
+          <a:xfrm>
+            <a:off x="475488" y="4066213"/>
+            <a:ext cx="11237976" cy="256032"/>
+          </a:xfrm>
+          <a:prstGeom prst="rect">
+            <a:avLst/>
+          </a:prstGeom>
+          <a:noFill/>
+        </p:spPr>
+        <p:txBody>
+          <a:bodyPr wrap="square" anchor="t" lIns="0" rIns="0" tIns="0" bIns="0">
+            <a:spAutoFit/>
+          </a:bodyPr>
+          <a:lstStyle/>
+          <a:p>
+            <a:pPr algn="l">
+              <a:lnSpc>
+                <a:spcPct val="114000"/>
+              </a:lnSpc>
+            </a:pPr>
+            <a:r>
+              <a:rPr sz="850" b="0">
+                <a:solidFill>
+                  <a:srgbClr val="5C6E6A"/>
+                </a:solidFill>
+              </a:rPr>
+              <a:t>▲ pytest：58 passed in 4.54s（本机实跑，非示例）</a:t>
+            </a:r>
+          </a:p>
+        </p:txBody>
+      </p:sp>
+      <p:sp>
+        <p:nvSpPr>
+          <p:cNvPr id="14" name="Rounded Rectangle 13"/>
+          <p:cNvSpPr/>
+          <p:nvPr/>
+        </p:nvSpPr>
+        <p:spPr>
+          <a:xfrm>
+            <a:off x="475488" y="4431973"/>
+            <a:ext cx="11237976" cy="822960"/>
+          </a:xfrm>
+          <a:prstGeom prst="roundRect">
+            <a:avLst>
+              <a:gd name="adj" fmla="val 5000"/>
+            </a:avLst>
+          </a:prstGeom>
+          <a:solidFill>
+            <a:srgbClr val="E4F1EE"/>
+          </a:solidFill>
+          <a:ln>
+            <a:noFill/>
+          </a:ln>
+          <a:effectLst/>
+        </p:spPr>
+        <p:style>
+          <a:lnRef idx="1">
+            <a:schemeClr val="accent1"/>
+          </a:lnRef>
+          <a:fillRef idx="3">
+            <a:schemeClr val="accent1"/>
+          </a:fillRef>
+          <a:effectRef idx="2">
+            <a:schemeClr val="accent1"/>
+          </a:effectRef>
+          <a:fontRef idx="minor">
+            <a:schemeClr val="lt1"/>
+          </a:fontRef>
+        </p:style>
+        <p:txBody>
+          <a:bodyPr rtlCol="0" anchor="ctr"/>
+          <a:lstStyle/>
+          <a:p>
+            <a:pPr algn="ctr"/>
+          </a:p>
+        </p:txBody>
+      </p:sp>
+      <p:sp>
+        <p:nvSpPr>
+          <p:cNvPr id="15" name="Rounded Rectangle 14"/>
+          <p:cNvSpPr/>
+          <p:nvPr/>
+        </p:nvSpPr>
+        <p:spPr>
+          <a:xfrm>
+            <a:off x="475488" y="4431973"/>
+            <a:ext cx="54864" cy="822960"/>
+          </a:xfrm>
+          <a:prstGeom prst="roundRect">
+            <a:avLst>
+              <a:gd name="adj" fmla="val 50000"/>
+            </a:avLst>
+          </a:prstGeom>
+          <a:solidFill>
+            <a:srgbClr val="C9A227"/>
+          </a:solidFill>
+          <a:ln>
+            <a:noFill/>
+          </a:ln>
+          <a:effectLst/>
+        </p:spPr>
+        <p:style>
+          <a:lnRef idx="1">
+            <a:schemeClr val="accent1"/>
+          </a:lnRef>
+          <a:fillRef idx="3">
+            <a:schemeClr val="accent1"/>
+          </a:fillRef>
+          <a:effectRef idx="2">
+            <a:schemeClr val="accent1"/>
+          </a:effectRef>
+          <a:fontRef idx="minor">
+            <a:schemeClr val="lt1"/>
+          </a:fontRef>
+        </p:style>
+        <p:txBody>
+          <a:bodyPr rtlCol="0" anchor="ctr"/>
+          <a:lstStyle/>
+          <a:p>
+            <a:pPr algn="ctr"/>
+          </a:p>
+        </p:txBody>
+      </p:sp>
+      <p:sp>
+        <p:nvSpPr>
+          <p:cNvPr id="16" name="TextBox 15"/>
+          <p:cNvSpPr txBox="1"/>
+          <p:nvPr/>
+        </p:nvSpPr>
+        <p:spPr>
+          <a:xfrm>
+            <a:off x="676656" y="4514269"/>
+            <a:ext cx="10908792" cy="658368"/>
+          </a:xfrm>
+          <a:prstGeom prst="rect">
+            <a:avLst/>
+          </a:prstGeom>
+          <a:noFill/>
+        </p:spPr>
+        <p:txBody>
+          <a:bodyPr wrap="square" anchor="t" lIns="0" rIns="0" tIns="0" bIns="0">
+            <a:spAutoFit/>
+          </a:bodyPr>
+          <a:lstStyle/>
+          <a:p>
+            <a:pPr algn="l">
+              <a:lnSpc>
+                <a:spcPct val="126000"/>
+              </a:lnSpc>
+            </a:pPr>
+            <a:r>
+              <a:rPr sz="850" b="0">
+                <a:solidFill>
+                  <a:srgbClr val="1B2B28"/>
+                </a:solidFill>
+              </a:rPr>
+              <a:t>本项目四档只有一套阶梯口径（课堂 D/C/B/A 即工单及格/良好/优秀/超优），逐字实测见上一页截图；本页补的是测试全绿证据。</a:t>
+            </a:r>
+          </a:p>
+          <a:p>
+            <a:pPr algn="l">
+              <a:lnSpc>
+                <a:spcPct val="126000"/>
+              </a:lnSpc>
+            </a:pPr>
+            <a:r>
+              <a:rPr sz="850" b="0">
+                <a:solidFill>
+                  <a:srgbClr val="1B2B28"/>
+                </a:solidFill>
+              </a:rPr>
+              <a:t>复现：cd 工程化项目/p55_warehouse_orm &amp;&amp; python -m pytest -q -o addopts=''</a:t>
+            </a:r>
+          </a:p>
+          <a:p>
+            <a:pPr algn="l">
+              <a:lnSpc>
+                <a:spcPct val="126000"/>
+              </a:lnSpc>
+            </a:pPr>
+            <a:r>
+              <a:rPr sz="850" b="0">
+                <a:solidFill>
+                  <a:srgbClr val="1B2B28"/>
+                </a:solidFill>
+              </a:rPr>
+              <a:t>工单提交：截图需含终端标题栏的文件名与完整输出，退出码 0 才算全绿。</a:t>
+            </a:r>
+          </a:p>
+        </p:txBody>
+      </p:sp>
+    </p:spTree>
+  </p:cSld>
+  <p:clrMapOvr>
+    <a:masterClrMapping/>
+  </p:clrMapOvr>
+</p:sld>
+</file>
+
 <file path=ppt/slides/slide7.xml><?xml version="1.0" encoding="utf-8"?>
 <p:sld xmlns:a="http://schemas.openxmlformats.org/drawingml/2006/main" xmlns:r="http://schemas.openxmlformats.org/officeDocument/2006/relationships" xmlns:p="http://schemas.openxmlformats.org/presentationml/2006/main">
   <p:cSld>
@@ -64549,7 +67664,7 @@
                 </a:solidFill>
                 <a:latin typeface="微软雅黑" panose="020B0502040204020203" charset="-122"/>
               </a:rPr>
-              <a:t>7 / 63</a:t>
+              <a:t>7 / 66</a:t>
             </a:r>
             <a:endParaRPr sz="1000" b="0">
               <a:solidFill>
@@ -65470,7 +68585,7 @@
                 </a:solidFill>
                 <a:latin typeface="微软雅黑" panose="020B0502040204020203" charset="-122"/>
               </a:rPr>
-              <a:t>8 / 63</a:t>
+              <a:t>8 / 66</a:t>
             </a:r>
             <a:endParaRPr sz="1000" b="0">
               <a:solidFill>
@@ -67204,7 +70319,7 @@
                 </a:solidFill>
                 <a:latin typeface="微软雅黑" panose="020B0502040204020203" charset="-122"/>
               </a:rPr>
-              <a:t>9 / 63</a:t>
+              <a:t>9 / 66</a:t>
             </a:r>
             <a:endParaRPr sz="1000" b="0">
               <a:solidFill>
